--- a/tamtamhomepage.pptx
+++ b/tamtamhomepage.pptx
@@ -272,7 +272,7 @@
           <a:p>
             <a:fld id="{89DF04BA-7F2C-40F8-A8EA-333A5CAD2DF3}" type="datetimeFigureOut">
               <a:rPr lang="ko-KR" altLang="en-US" smtClean="0"/>
-              <a:t>2026-10-27</a:t>
+              <a:t>2026-10-28</a:t>
             </a:fld>
             <a:endParaRPr lang="ko-KR" altLang="en-US"/>
           </a:p>
@@ -470,7 +470,7 @@
           <a:p>
             <a:fld id="{89DF04BA-7F2C-40F8-A8EA-333A5CAD2DF3}" type="datetimeFigureOut">
               <a:rPr lang="ko-KR" altLang="en-US" smtClean="0"/>
-              <a:t>2026-10-27</a:t>
+              <a:t>2026-10-28</a:t>
             </a:fld>
             <a:endParaRPr lang="ko-KR" altLang="en-US"/>
           </a:p>
@@ -678,7 +678,7 @@
           <a:p>
             <a:fld id="{89DF04BA-7F2C-40F8-A8EA-333A5CAD2DF3}" type="datetimeFigureOut">
               <a:rPr lang="ko-KR" altLang="en-US" smtClean="0"/>
-              <a:t>2026-10-27</a:t>
+              <a:t>2026-10-28</a:t>
             </a:fld>
             <a:endParaRPr lang="ko-KR" altLang="en-US"/>
           </a:p>
@@ -876,7 +876,7 @@
           <a:p>
             <a:fld id="{89DF04BA-7F2C-40F8-A8EA-333A5CAD2DF3}" type="datetimeFigureOut">
               <a:rPr lang="ko-KR" altLang="en-US" smtClean="0"/>
-              <a:t>2026-10-27</a:t>
+              <a:t>2026-10-28</a:t>
             </a:fld>
             <a:endParaRPr lang="ko-KR" altLang="en-US"/>
           </a:p>
@@ -1151,7 +1151,7 @@
           <a:p>
             <a:fld id="{89DF04BA-7F2C-40F8-A8EA-333A5CAD2DF3}" type="datetimeFigureOut">
               <a:rPr lang="ko-KR" altLang="en-US" smtClean="0"/>
-              <a:t>2026-10-27</a:t>
+              <a:t>2026-10-28</a:t>
             </a:fld>
             <a:endParaRPr lang="ko-KR" altLang="en-US"/>
           </a:p>
@@ -1416,7 +1416,7 @@
           <a:p>
             <a:fld id="{89DF04BA-7F2C-40F8-A8EA-333A5CAD2DF3}" type="datetimeFigureOut">
               <a:rPr lang="ko-KR" altLang="en-US" smtClean="0"/>
-              <a:t>2026-10-27</a:t>
+              <a:t>2026-10-28</a:t>
             </a:fld>
             <a:endParaRPr lang="ko-KR" altLang="en-US"/>
           </a:p>
@@ -1828,7 +1828,7 @@
           <a:p>
             <a:fld id="{89DF04BA-7F2C-40F8-A8EA-333A5CAD2DF3}" type="datetimeFigureOut">
               <a:rPr lang="ko-KR" altLang="en-US" smtClean="0"/>
-              <a:t>2026-10-27</a:t>
+              <a:t>2026-10-28</a:t>
             </a:fld>
             <a:endParaRPr lang="ko-KR" altLang="en-US"/>
           </a:p>
@@ -1969,7 +1969,7 @@
           <a:p>
             <a:fld id="{89DF04BA-7F2C-40F8-A8EA-333A5CAD2DF3}" type="datetimeFigureOut">
               <a:rPr lang="ko-KR" altLang="en-US" smtClean="0"/>
-              <a:t>2026-10-27</a:t>
+              <a:t>2026-10-28</a:t>
             </a:fld>
             <a:endParaRPr lang="ko-KR" altLang="en-US"/>
           </a:p>
@@ -2082,7 +2082,7 @@
           <a:p>
             <a:fld id="{89DF04BA-7F2C-40F8-A8EA-333A5CAD2DF3}" type="datetimeFigureOut">
               <a:rPr lang="ko-KR" altLang="en-US" smtClean="0"/>
-              <a:t>2026-10-27</a:t>
+              <a:t>2026-10-28</a:t>
             </a:fld>
             <a:endParaRPr lang="ko-KR" altLang="en-US"/>
           </a:p>
@@ -2393,7 +2393,7 @@
           <a:p>
             <a:fld id="{89DF04BA-7F2C-40F8-A8EA-333A5CAD2DF3}" type="datetimeFigureOut">
               <a:rPr lang="ko-KR" altLang="en-US" smtClean="0"/>
-              <a:t>2026-10-27</a:t>
+              <a:t>2026-10-28</a:t>
             </a:fld>
             <a:endParaRPr lang="ko-KR" altLang="en-US"/>
           </a:p>
@@ -2681,7 +2681,7 @@
           <a:p>
             <a:fld id="{89DF04BA-7F2C-40F8-A8EA-333A5CAD2DF3}" type="datetimeFigureOut">
               <a:rPr lang="ko-KR" altLang="en-US" smtClean="0"/>
-              <a:t>2026-10-27</a:t>
+              <a:t>2026-10-28</a:t>
             </a:fld>
             <a:endParaRPr lang="ko-KR" altLang="en-US"/>
           </a:p>
@@ -2922,7 +2922,7 @@
           <a:p>
             <a:fld id="{89DF04BA-7F2C-40F8-A8EA-333A5CAD2DF3}" type="datetimeFigureOut">
               <a:rPr lang="ko-KR" altLang="en-US" smtClean="0"/>
-              <a:t>2026-10-27</a:t>
+              <a:t>2026-10-28</a:t>
             </a:fld>
             <a:endParaRPr lang="ko-KR" altLang="en-US"/>
           </a:p>
@@ -3395,7 +3395,7 @@
         <p:spPr>
           <a:xfrm>
             <a:off x="217715" y="869752"/>
-            <a:ext cx="6096000" cy="4093428"/>
+            <a:ext cx="6096000" cy="6093976"/>
           </a:xfrm>
           <a:prstGeom prst="rect">
             <a:avLst/>
@@ -3422,6 +3422,551 @@
               <a:rPr lang="ko-KR" altLang="en-US" sz="1000" dirty="0"/>
               <a:t>│</a:t>
             </a:r>
+            <a:endParaRPr lang="en-US" altLang="ko-KR" sz="1000" dirty="0"/>
+          </a:p>
+          <a:p>
+            <a:r>
+              <a:rPr lang="ko-KR" altLang="en-US" sz="1000" dirty="0">
+                <a:solidFill>
+                  <a:schemeClr val="tx2">
+                    <a:lumMod val="50000"/>
+                    <a:lumOff val="50000"/>
+                  </a:schemeClr>
+                </a:solidFill>
+              </a:rPr>
+              <a:t>├── index.html           # 첫 화면 (시안 디자인 반영)</a:t>
+            </a:r>
+          </a:p>
+          <a:p>
+            <a:r>
+              <a:rPr lang="ko-KR" altLang="en-US" sz="1000" dirty="0">
+                <a:solidFill>
+                  <a:schemeClr val="tx2">
+                    <a:lumMod val="50000"/>
+                    <a:lumOff val="50000"/>
+                  </a:schemeClr>
+                </a:solidFill>
+              </a:rPr>
+              <a:t>├── .</a:t>
+            </a:r>
+            <a:r>
+              <a:rPr lang="ko-KR" altLang="en-US" sz="1000" dirty="0" err="1">
+                <a:solidFill>
+                  <a:schemeClr val="tx2">
+                    <a:lumMod val="50000"/>
+                    <a:lumOff val="50000"/>
+                  </a:schemeClr>
+                </a:solidFill>
+              </a:rPr>
+              <a:t>gitignore</a:t>
+            </a:r>
+            <a:r>
+              <a:rPr lang="ko-KR" altLang="en-US" sz="1000" dirty="0">
+                <a:solidFill>
+                  <a:schemeClr val="tx2">
+                    <a:lumMod val="50000"/>
+                    <a:lumOff val="50000"/>
+                  </a:schemeClr>
+                </a:solidFill>
+              </a:rPr>
+              <a:t>               🔒 [보안 파일 차단 설정] (매우 중요!)</a:t>
+            </a:r>
+          </a:p>
+          <a:p>
+            <a:r>
+              <a:rPr lang="ko-KR" altLang="en-US" sz="1000" dirty="0">
+                <a:solidFill>
+                  <a:schemeClr val="tx2">
+                    <a:lumMod val="50000"/>
+                    <a:lumOff val="50000"/>
+                  </a:schemeClr>
+                </a:solidFill>
+              </a:rPr>
+              <a:t>└── </a:t>
+            </a:r>
+            <a:r>
+              <a:rPr lang="en-US" altLang="ko-KR" sz="1000" dirty="0">
+                <a:solidFill>
+                  <a:schemeClr val="tx2">
+                    <a:lumMod val="50000"/>
+                    <a:lumOff val="50000"/>
+                  </a:schemeClr>
+                </a:solidFill>
+              </a:rPr>
+              <a:t>tamtamhomepage.pptx</a:t>
+            </a:r>
+            <a:r>
+              <a:rPr lang="ko-KR" altLang="en-US" sz="1000" dirty="0">
+                <a:solidFill>
+                  <a:schemeClr val="tx2">
+                    <a:lumMod val="50000"/>
+                    <a:lumOff val="50000"/>
+                  </a:schemeClr>
+                </a:solidFill>
+              </a:rPr>
+              <a:t>                📖 프로젝트 설명서</a:t>
+            </a:r>
+            <a:endParaRPr lang="en-US" altLang="ko-KR" sz="1000" dirty="0">
+              <a:solidFill>
+                <a:schemeClr val="tx2">
+                  <a:lumMod val="50000"/>
+                  <a:lumOff val="50000"/>
+                </a:schemeClr>
+              </a:solidFill>
+            </a:endParaRPr>
+          </a:p>
+          <a:p>
+            <a:r>
+              <a:rPr lang="ko-KR" altLang="en-US" sz="1000" dirty="0">
+                <a:solidFill>
+                  <a:schemeClr val="tx2">
+                    <a:lumMod val="50000"/>
+                    <a:lumOff val="50000"/>
+                  </a:schemeClr>
+                </a:solidFill>
+              </a:rPr>
+              <a:t>│</a:t>
+            </a:r>
+          </a:p>
+          <a:p>
+            <a:r>
+              <a:rPr lang="ko-KR" altLang="en-US" sz="1000" dirty="0">
+                <a:solidFill>
+                  <a:schemeClr val="tx2">
+                    <a:lumMod val="50000"/>
+                    <a:lumOff val="50000"/>
+                  </a:schemeClr>
+                </a:solidFill>
+              </a:rPr>
+              <a:t>├── </a:t>
+            </a:r>
+            <a:r>
+              <a:rPr lang="ko-KR" altLang="en-US" sz="1000" dirty="0" err="1">
+                <a:solidFill>
+                  <a:schemeClr val="tx2">
+                    <a:lumMod val="50000"/>
+                    <a:lumOff val="50000"/>
+                  </a:schemeClr>
+                </a:solidFill>
+              </a:rPr>
+              <a:t>web</a:t>
+            </a:r>
+            <a:r>
+              <a:rPr lang="ko-KR" altLang="en-US" sz="1000" dirty="0">
+                <a:solidFill>
+                  <a:schemeClr val="tx2">
+                    <a:lumMod val="50000"/>
+                    <a:lumOff val="50000"/>
+                  </a:schemeClr>
+                </a:solidFill>
+              </a:rPr>
+              <a:t>/                     🌐 [웹 </a:t>
+            </a:r>
+            <a:r>
+              <a:rPr lang="ko-KR" altLang="en-US" sz="1000" dirty="0" err="1">
+                <a:solidFill>
+                  <a:schemeClr val="tx2">
+                    <a:lumMod val="50000"/>
+                    <a:lumOff val="50000"/>
+                  </a:schemeClr>
+                </a:solidFill>
+              </a:rPr>
+              <a:t>프론트엔드</a:t>
+            </a:r>
+            <a:r>
+              <a:rPr lang="ko-KR" altLang="en-US" sz="1000" dirty="0">
+                <a:solidFill>
+                  <a:schemeClr val="tx2">
+                    <a:lumMod val="50000"/>
+                    <a:lumOff val="50000"/>
+                  </a:schemeClr>
+                </a:solidFill>
+              </a:rPr>
+              <a:t> 영역] (사용자가 브라우저로 접속하는 화면)</a:t>
+            </a:r>
+          </a:p>
+          <a:p>
+            <a:r>
+              <a:rPr lang="ko-KR" altLang="en-US" sz="1000" dirty="0">
+                <a:solidFill>
+                  <a:schemeClr val="tx2">
+                    <a:lumMod val="50000"/>
+                    <a:lumOff val="50000"/>
+                  </a:schemeClr>
+                </a:solidFill>
+              </a:rPr>
+              <a:t>│   │   ├── teacher_login.html   # 선생님 로그인 및 관리자 대시보드</a:t>
+            </a:r>
+            <a:endParaRPr lang="en-US" altLang="ko-KR" sz="1000" dirty="0">
+              <a:solidFill>
+                <a:schemeClr val="tx2">
+                  <a:lumMod val="50000"/>
+                  <a:lumOff val="50000"/>
+                </a:schemeClr>
+              </a:solidFill>
+            </a:endParaRPr>
+          </a:p>
+          <a:p>
+            <a:r>
+              <a:rPr lang="ko-KR" altLang="en-US" sz="1000" dirty="0">
+                <a:solidFill>
+                  <a:schemeClr val="tx2">
+                    <a:lumMod val="50000"/>
+                    <a:lumOff val="50000"/>
+                  </a:schemeClr>
+                </a:solidFill>
+              </a:rPr>
+              <a:t>│   │   ├── </a:t>
+            </a:r>
+            <a:r>
+              <a:rPr lang="en-US" altLang="ko-KR" sz="1000" dirty="0">
+                <a:solidFill>
+                  <a:schemeClr val="tx2">
+                    <a:lumMod val="50000"/>
+                    <a:lumOff val="50000"/>
+                  </a:schemeClr>
+                </a:solidFill>
+              </a:rPr>
+              <a:t>explore.html # </a:t>
+            </a:r>
+            <a:r>
+              <a:rPr lang="ko-KR" altLang="en-US" sz="1000" dirty="0">
+                <a:solidFill>
+                  <a:schemeClr val="tx2">
+                    <a:lumMod val="50000"/>
+                    <a:lumOff val="50000"/>
+                  </a:schemeClr>
+                </a:solidFill>
+              </a:rPr>
+              <a:t>방문객 연결 링크모음</a:t>
+            </a:r>
+            <a:endParaRPr lang="en-US" altLang="ko-KR" sz="1000" dirty="0">
+              <a:solidFill>
+                <a:schemeClr val="tx2">
+                  <a:lumMod val="50000"/>
+                  <a:lumOff val="50000"/>
+                </a:schemeClr>
+              </a:solidFill>
+            </a:endParaRPr>
+          </a:p>
+          <a:p>
+            <a:r>
+              <a:rPr lang="ko-KR" altLang="en-US" sz="1000" dirty="0">
+                <a:solidFill>
+                  <a:schemeClr val="tx2">
+                    <a:lumMod val="50000"/>
+                    <a:lumOff val="50000"/>
+                  </a:schemeClr>
+                </a:solidFill>
+              </a:rPr>
+              <a:t>│   │   ├── </a:t>
+            </a:r>
+            <a:r>
+              <a:rPr lang="en-US" altLang="ko-KR" sz="1000" dirty="0">
+                <a:solidFill>
+                  <a:schemeClr val="tx2">
+                    <a:lumMod val="50000"/>
+                    <a:lumOff val="50000"/>
+                  </a:schemeClr>
+                </a:solidFill>
+              </a:rPr>
+              <a:t>dashboard.html # </a:t>
+            </a:r>
+            <a:r>
+              <a:rPr lang="ko-KR" altLang="en-US" sz="1000" dirty="0">
+                <a:solidFill>
+                  <a:schemeClr val="tx2">
+                    <a:lumMod val="50000"/>
+                    <a:lumOff val="50000"/>
+                  </a:schemeClr>
+                </a:solidFill>
+              </a:rPr>
+              <a:t>선생님 </a:t>
+            </a:r>
+            <a:r>
+              <a:rPr lang="ko-KR" altLang="en-US" sz="1000" dirty="0" err="1">
+                <a:solidFill>
+                  <a:schemeClr val="tx2">
+                    <a:lumMod val="50000"/>
+                    <a:lumOff val="50000"/>
+                  </a:schemeClr>
+                </a:solidFill>
+              </a:rPr>
+              <a:t>로그인후</a:t>
+            </a:r>
+            <a:r>
+              <a:rPr lang="ko-KR" altLang="en-US" sz="1000" dirty="0">
+                <a:solidFill>
+                  <a:schemeClr val="tx2">
+                    <a:lumMod val="50000"/>
+                    <a:lumOff val="50000"/>
+                  </a:schemeClr>
+                </a:solidFill>
+              </a:rPr>
+              <a:t> 모음 열기</a:t>
+            </a:r>
+          </a:p>
+          <a:p>
+            <a:r>
+              <a:rPr lang="ko-KR" altLang="en-US" sz="1000" dirty="0">
+                <a:solidFill>
+                  <a:schemeClr val="tx2">
+                    <a:lumMod val="50000"/>
+                    <a:lumOff val="50000"/>
+                  </a:schemeClr>
+                </a:solidFill>
+              </a:rPr>
+              <a:t>│   ├── </a:t>
+            </a:r>
+            <a:r>
+              <a:rPr lang="ko-KR" altLang="en-US" sz="1000" dirty="0" err="1">
+                <a:solidFill>
+                  <a:schemeClr val="tx2">
+                    <a:lumMod val="50000"/>
+                    <a:lumOff val="50000"/>
+                  </a:schemeClr>
+                </a:solidFill>
+              </a:rPr>
+              <a:t>css</a:t>
+            </a:r>
+            <a:r>
+              <a:rPr lang="ko-KR" altLang="en-US" sz="1000" dirty="0">
+                <a:solidFill>
+                  <a:schemeClr val="tx2">
+                    <a:lumMod val="50000"/>
+                    <a:lumOff val="50000"/>
+                  </a:schemeClr>
+                </a:solidFill>
+              </a:rPr>
+              <a:t>/</a:t>
+            </a:r>
+          </a:p>
+          <a:p>
+            <a:r>
+              <a:rPr lang="ko-KR" altLang="en-US" sz="1000" dirty="0">
+                <a:solidFill>
+                  <a:schemeClr val="tx2">
+                    <a:lumMod val="50000"/>
+                    <a:lumOff val="50000"/>
+                  </a:schemeClr>
+                </a:solidFill>
+              </a:rPr>
+              <a:t>│   │   └── style.css        # 공통 디자인 스타일시트</a:t>
+            </a:r>
+          </a:p>
+          <a:p>
+            <a:r>
+              <a:rPr lang="ko-KR" altLang="en-US" sz="1000" dirty="0">
+                <a:solidFill>
+                  <a:schemeClr val="tx2">
+                    <a:lumMod val="50000"/>
+                    <a:lumOff val="50000"/>
+                  </a:schemeClr>
+                </a:solidFill>
+              </a:rPr>
+              <a:t>│   └── </a:t>
+            </a:r>
+            <a:r>
+              <a:rPr lang="ko-KR" altLang="en-US" sz="1000" dirty="0" err="1">
+                <a:solidFill>
+                  <a:schemeClr val="tx2">
+                    <a:lumMod val="50000"/>
+                    <a:lumOff val="50000"/>
+                  </a:schemeClr>
+                </a:solidFill>
+              </a:rPr>
+              <a:t>js</a:t>
+            </a:r>
+            <a:r>
+              <a:rPr lang="ko-KR" altLang="en-US" sz="1000" dirty="0">
+                <a:solidFill>
+                  <a:schemeClr val="tx2">
+                    <a:lumMod val="50000"/>
+                    <a:lumOff val="50000"/>
+                  </a:schemeClr>
+                </a:solidFill>
+              </a:rPr>
+              <a:t>/</a:t>
+            </a:r>
+          </a:p>
+          <a:p>
+            <a:r>
+              <a:rPr lang="ko-KR" altLang="en-US" sz="1000" dirty="0">
+                <a:solidFill>
+                  <a:schemeClr val="tx2">
+                    <a:lumMod val="50000"/>
+                    <a:lumOff val="50000"/>
+                  </a:schemeClr>
+                </a:solidFill>
+              </a:rPr>
+              <a:t>│       ├── firebase.js      # </a:t>
+            </a:r>
+            <a:r>
+              <a:rPr lang="ko-KR" altLang="en-US" sz="1000" dirty="0" err="1">
+                <a:solidFill>
+                  <a:schemeClr val="tx2">
+                    <a:lumMod val="50000"/>
+                    <a:lumOff val="50000"/>
+                  </a:schemeClr>
+                </a:solidFill>
+              </a:rPr>
+              <a:t>파이어베이스</a:t>
+            </a:r>
+            <a:r>
+              <a:rPr lang="ko-KR" altLang="en-US" sz="1000" dirty="0">
+                <a:solidFill>
+                  <a:schemeClr val="tx2">
+                    <a:lumMod val="50000"/>
+                    <a:lumOff val="50000"/>
+                  </a:schemeClr>
+                </a:solidFill>
+              </a:rPr>
+              <a:t> 공통 설정 (웹용)</a:t>
+            </a:r>
+          </a:p>
+          <a:p>
+            <a:r>
+              <a:rPr lang="ko-KR" altLang="en-US" sz="1000" dirty="0">
+                <a:solidFill>
+                  <a:schemeClr val="tx2">
+                    <a:lumMod val="50000"/>
+                    <a:lumOff val="50000"/>
+                  </a:schemeClr>
+                </a:solidFill>
+              </a:rPr>
+              <a:t>│       └── auth.js          # 인증 관련 공통 로직</a:t>
+            </a:r>
+          </a:p>
+          <a:p>
+            <a:r>
+              <a:rPr lang="ko-KR" altLang="en-US" sz="1000" dirty="0">
+                <a:solidFill>
+                  <a:schemeClr val="tx2">
+                    <a:lumMod val="50000"/>
+                    <a:lumOff val="50000"/>
+                  </a:schemeClr>
+                </a:solidFill>
+              </a:rPr>
+              <a:t>│</a:t>
+            </a:r>
+            <a:endParaRPr lang="en-US" altLang="ko-KR" sz="1000" dirty="0">
+              <a:solidFill>
+                <a:schemeClr val="tx2">
+                  <a:lumMod val="50000"/>
+                  <a:lumOff val="50000"/>
+                </a:schemeClr>
+              </a:solidFill>
+            </a:endParaRPr>
+          </a:p>
+          <a:p>
+            <a:endParaRPr lang="en-US" altLang="ko-KR" sz="1000" dirty="0">
+              <a:solidFill>
+                <a:schemeClr val="tx2">
+                  <a:lumMod val="50000"/>
+                  <a:lumOff val="50000"/>
+                </a:schemeClr>
+              </a:solidFill>
+            </a:endParaRPr>
+          </a:p>
+          <a:p>
+            <a:endParaRPr lang="en-US" altLang="ko-KR" sz="1000" dirty="0">
+              <a:solidFill>
+                <a:schemeClr val="tx2">
+                  <a:lumMod val="50000"/>
+                  <a:lumOff val="50000"/>
+                </a:schemeClr>
+              </a:solidFill>
+            </a:endParaRPr>
+          </a:p>
+          <a:p>
+            <a:endParaRPr lang="en-US" altLang="ko-KR" sz="1000" dirty="0">
+              <a:solidFill>
+                <a:schemeClr val="tx2">
+                  <a:lumMod val="50000"/>
+                  <a:lumOff val="50000"/>
+                </a:schemeClr>
+              </a:solidFill>
+            </a:endParaRPr>
+          </a:p>
+          <a:p>
+            <a:endParaRPr lang="en-US" altLang="ko-KR" sz="1000" dirty="0">
+              <a:solidFill>
+                <a:schemeClr val="tx2">
+                  <a:lumMod val="50000"/>
+                  <a:lumOff val="50000"/>
+                </a:schemeClr>
+              </a:solidFill>
+            </a:endParaRPr>
+          </a:p>
+          <a:p>
+            <a:endParaRPr lang="en-US" altLang="ko-KR" sz="1000" dirty="0">
+              <a:solidFill>
+                <a:schemeClr val="tx2">
+                  <a:lumMod val="50000"/>
+                  <a:lumOff val="50000"/>
+                </a:schemeClr>
+              </a:solidFill>
+            </a:endParaRPr>
+          </a:p>
+          <a:p>
+            <a:endParaRPr lang="en-US" altLang="ko-KR" sz="1000" dirty="0">
+              <a:solidFill>
+                <a:schemeClr val="tx2">
+                  <a:lumMod val="50000"/>
+                  <a:lumOff val="50000"/>
+                </a:schemeClr>
+              </a:solidFill>
+            </a:endParaRPr>
+          </a:p>
+          <a:p>
+            <a:endParaRPr lang="en-US" altLang="ko-KR" sz="1000" dirty="0">
+              <a:solidFill>
+                <a:schemeClr val="tx2">
+                  <a:lumMod val="50000"/>
+                  <a:lumOff val="50000"/>
+                </a:schemeClr>
+              </a:solidFill>
+            </a:endParaRPr>
+          </a:p>
+          <a:p>
+            <a:endParaRPr lang="en-US" altLang="ko-KR" sz="1000" dirty="0">
+              <a:solidFill>
+                <a:schemeClr val="tx2">
+                  <a:lumMod val="50000"/>
+                  <a:lumOff val="50000"/>
+                </a:schemeClr>
+              </a:solidFill>
+            </a:endParaRPr>
+          </a:p>
+          <a:p>
+            <a:endParaRPr lang="en-US" altLang="ko-KR" sz="1000" dirty="0">
+              <a:solidFill>
+                <a:schemeClr val="tx2">
+                  <a:lumMod val="50000"/>
+                  <a:lumOff val="50000"/>
+                </a:schemeClr>
+              </a:solidFill>
+            </a:endParaRPr>
+          </a:p>
+          <a:p>
+            <a:endParaRPr lang="en-US" altLang="ko-KR" sz="1000" dirty="0">
+              <a:solidFill>
+                <a:schemeClr val="tx2">
+                  <a:lumMod val="50000"/>
+                  <a:lumOff val="50000"/>
+                </a:schemeClr>
+              </a:solidFill>
+            </a:endParaRPr>
+          </a:p>
+          <a:p>
+            <a:endParaRPr lang="ko-KR" altLang="en-US" sz="1000" dirty="0">
+              <a:solidFill>
+                <a:schemeClr val="tx2">
+                  <a:lumMod val="50000"/>
+                  <a:lumOff val="50000"/>
+                </a:schemeClr>
+              </a:solidFill>
+            </a:endParaRPr>
           </a:p>
           <a:p>
             <a:r>
@@ -3430,25 +3975,19 @@
             </a:r>
             <a:r>
               <a:rPr lang="ko-KR" altLang="en-US" sz="1000" dirty="0" err="1"/>
-              <a:t>web</a:t>
+              <a:t>python_backend</a:t>
             </a:r>
             <a:r>
               <a:rPr lang="ko-KR" altLang="en-US" sz="1000" dirty="0"/>
-              <a:t>/                     🌐 [웹 </a:t>
+              <a:t>/          🐍 [파이썬 </a:t>
             </a:r>
             <a:r>
               <a:rPr lang="ko-KR" altLang="en-US" sz="1000" dirty="0" err="1"/>
-              <a:t>프론트엔드</a:t>
+              <a:t>백엔드</a:t>
             </a:r>
             <a:r>
               <a:rPr lang="ko-KR" altLang="en-US" sz="1000" dirty="0"/>
-              <a:t> 영역] (사용자가 브라우저로 접속하는 화면)</a:t>
-            </a:r>
-          </a:p>
-          <a:p>
-            <a:r>
-              <a:rPr lang="ko-KR" altLang="en-US" sz="1000" dirty="0"/>
-              <a:t>│   │   ├── teacher_login.html   # 선생님 로그인 및 관리자 대시보드</a:t>
+              <a:t>/유틸리티 영역] (기존에 만드신 프로그램들)</a:t>
             </a:r>
           </a:p>
           <a:p>
@@ -3458,51 +3997,113 @@
             </a:r>
             <a:r>
               <a:rPr lang="ko-KR" altLang="en-US" sz="1000" dirty="0" err="1"/>
-              <a:t>css</a:t>
+              <a:t>DB_class</a:t>
             </a:r>
             <a:r>
               <a:rPr lang="ko-KR" altLang="en-US" sz="1000" dirty="0"/>
-              <a:t>/</a:t>
+              <a:t>/            # 학생, 부모님 DB 클래스</a:t>
             </a:r>
           </a:p>
           <a:p>
             <a:r>
               <a:rPr lang="ko-KR" altLang="en-US" sz="1000" dirty="0"/>
-              <a:t>│   │   └── style.css        # 공통 디자인 스타일시트</a:t>
-            </a:r>
-          </a:p>
-          <a:p>
+              <a:t>│   ├── </a:t>
+            </a:r>
+            <a:r>
+              <a:rPr lang="ko-KR" altLang="en-US" sz="1000" dirty="0" err="1"/>
+              <a:t>db_search_prg</a:t>
+            </a:r>
             <a:r>
               <a:rPr lang="ko-KR" altLang="en-US" sz="1000" dirty="0"/>
-              <a:t>│   └── </a:t>
+              <a:t>/       # DB 조회 프로그램들</a:t>
+            </a:r>
+          </a:p>
+          <a:p>
+            <a:r>
+              <a:rPr lang="ko-KR" altLang="en-US" sz="1000" dirty="0"/>
+              <a:t>│   ├── </a:t>
             </a:r>
             <a:r>
               <a:rPr lang="ko-KR" altLang="en-US" sz="1000" dirty="0" err="1"/>
-              <a:t>js</a:t>
+              <a:t>db_store_prg</a:t>
             </a:r>
             <a:r>
               <a:rPr lang="ko-KR" altLang="en-US" sz="1000" dirty="0"/>
-              <a:t>/</a:t>
+              <a:t>/        # DB 저장 프로그램들</a:t>
             </a:r>
           </a:p>
           <a:p>
             <a:r>
               <a:rPr lang="ko-KR" altLang="en-US" sz="1000" dirty="0"/>
-              <a:t>│       ├── firebase.js      # </a:t>
+              <a:t>│   ├── </a:t>
             </a:r>
             <a:r>
               <a:rPr lang="ko-KR" altLang="en-US" sz="1000" dirty="0" err="1"/>
-              <a:t>파이어베이스</a:t>
+              <a:t>member_registration</a:t>
             </a:r>
             <a:r>
               <a:rPr lang="ko-KR" altLang="en-US" sz="1000" dirty="0"/>
-              <a:t> 공통 설정 (웹용)</a:t>
+              <a:t>/ # 회원 등록 관련 스크립트</a:t>
             </a:r>
           </a:p>
           <a:p>
             <a:r>
               <a:rPr lang="ko-KR" altLang="en-US" sz="1000" dirty="0"/>
-              <a:t>│       └── auth.js          # 인증 관련 공통 로직</a:t>
+              <a:t>│   ├── </a:t>
+            </a:r>
+            <a:r>
+              <a:rPr lang="ko-KR" altLang="en-US" sz="1000" dirty="0" err="1"/>
+              <a:t>phone_link</a:t>
+            </a:r>
+            <a:r>
+              <a:rPr lang="ko-KR" altLang="en-US" sz="1000" dirty="0"/>
+              <a:t>/          # 폰 연동 및 메시지 관련</a:t>
+            </a:r>
+          </a:p>
+          <a:p>
+            <a:r>
+              <a:rPr lang="ko-KR" altLang="en-US" sz="1000" dirty="0"/>
+              <a:t>│   ├── </a:t>
+            </a:r>
+            <a:r>
+              <a:rPr lang="ko-KR" altLang="en-US" sz="1000" dirty="0" err="1"/>
+              <a:t>message_templat</a:t>
+            </a:r>
+            <a:r>
+              <a:rPr lang="ko-KR" altLang="en-US" sz="1000" dirty="0"/>
+              <a:t>/     # 메시지 템플릿</a:t>
+            </a:r>
+          </a:p>
+          <a:p>
+            <a:r>
+              <a:rPr lang="ko-KR" altLang="en-US" sz="1000" dirty="0"/>
+              <a:t>│   ├── </a:t>
+            </a:r>
+            <a:r>
+              <a:rPr lang="ko-KR" altLang="en-US" sz="1000" dirty="0" err="1"/>
+              <a:t>Work_daily</a:t>
+            </a:r>
+            <a:r>
+              <a:rPr lang="ko-KR" altLang="en-US" sz="1000" dirty="0"/>
+              <a:t>/          # 일일 업무 정리</a:t>
+            </a:r>
+          </a:p>
+          <a:p>
+            <a:r>
+              <a:rPr lang="ko-KR" altLang="en-US" sz="1000" dirty="0"/>
+              <a:t>│   ├── app_config.py</a:t>
+            </a:r>
+          </a:p>
+          <a:p>
+            <a:r>
+              <a:rPr lang="ko-KR" altLang="en-US" sz="1000" dirty="0"/>
+              <a:t>│   ├── config.py</a:t>
+            </a:r>
+          </a:p>
+          <a:p>
+            <a:r>
+              <a:rPr lang="ko-KR" altLang="en-US" sz="1000" dirty="0"/>
+              <a:t>│   └── requirements.txt     # 파이썬 라이브러리 목록</a:t>
             </a:r>
           </a:p>
           <a:p>
@@ -3510,176 +4111,235 @@
               <a:rPr lang="ko-KR" altLang="en-US" sz="1000" dirty="0"/>
               <a:t>│</a:t>
             </a:r>
-          </a:p>
-          <a:p>
-            <a:r>
-              <a:rPr lang="ko-KR" altLang="en-US" sz="1000" dirty="0"/>
-              <a:t>├── </a:t>
-            </a:r>
-            <a:r>
-              <a:rPr lang="ko-KR" altLang="en-US" sz="1000" dirty="0" err="1"/>
-              <a:t>python_backend</a:t>
-            </a:r>
-            <a:r>
-              <a:rPr lang="ko-KR" altLang="en-US" sz="1000" dirty="0"/>
-              <a:t>/          🐍 [파이썬 </a:t>
-            </a:r>
-            <a:r>
-              <a:rPr lang="ko-KR" altLang="en-US" sz="1000" dirty="0" err="1"/>
-              <a:t>백엔드</a:t>
-            </a:r>
-            <a:r>
-              <a:rPr lang="ko-KR" altLang="en-US" sz="1000" dirty="0"/>
-              <a:t>/유틸리티 영역] (기존에 만드신 프로그램들)</a:t>
-            </a:r>
-          </a:p>
-          <a:p>
-            <a:r>
-              <a:rPr lang="ko-KR" altLang="en-US" sz="1000" dirty="0"/>
-              <a:t>│   ├── </a:t>
-            </a:r>
-            <a:r>
-              <a:rPr lang="ko-KR" altLang="en-US" sz="1000" dirty="0" err="1"/>
-              <a:t>DB_class</a:t>
-            </a:r>
-            <a:r>
-              <a:rPr lang="ko-KR" altLang="en-US" sz="1000" dirty="0"/>
-              <a:t>/            # 학생, 부모님 DB 클래스</a:t>
-            </a:r>
-          </a:p>
-          <a:p>
-            <a:r>
-              <a:rPr lang="ko-KR" altLang="en-US" sz="1000" dirty="0"/>
-              <a:t>│   ├── </a:t>
-            </a:r>
-            <a:r>
-              <a:rPr lang="ko-KR" altLang="en-US" sz="1000" dirty="0" err="1"/>
-              <a:t>db_search_prg</a:t>
-            </a:r>
-            <a:r>
-              <a:rPr lang="ko-KR" altLang="en-US" sz="1000" dirty="0"/>
-              <a:t>/       # DB 조회 프로그램들</a:t>
-            </a:r>
-          </a:p>
-          <a:p>
-            <a:r>
-              <a:rPr lang="ko-KR" altLang="en-US" sz="1000" dirty="0"/>
-              <a:t>│   ├── </a:t>
-            </a:r>
-            <a:r>
-              <a:rPr lang="ko-KR" altLang="en-US" sz="1000" dirty="0" err="1"/>
-              <a:t>db_store_prg</a:t>
-            </a:r>
-            <a:r>
-              <a:rPr lang="ko-KR" altLang="en-US" sz="1000" dirty="0"/>
-              <a:t>/        # DB 저장 프로그램들</a:t>
-            </a:r>
-          </a:p>
-          <a:p>
-            <a:r>
-              <a:rPr lang="ko-KR" altLang="en-US" sz="1000" dirty="0"/>
-              <a:t>│   ├── </a:t>
-            </a:r>
-            <a:r>
-              <a:rPr lang="ko-KR" altLang="en-US" sz="1000" dirty="0" err="1"/>
-              <a:t>member_registration</a:t>
-            </a:r>
-            <a:r>
-              <a:rPr lang="ko-KR" altLang="en-US" sz="1000" dirty="0"/>
-              <a:t>/ # 회원 등록 관련 스크립트</a:t>
-            </a:r>
-          </a:p>
-          <a:p>
-            <a:r>
-              <a:rPr lang="ko-KR" altLang="en-US" sz="1000" dirty="0"/>
-              <a:t>│   ├── </a:t>
-            </a:r>
-            <a:r>
-              <a:rPr lang="ko-KR" altLang="en-US" sz="1000" dirty="0" err="1"/>
-              <a:t>phone_link</a:t>
-            </a:r>
-            <a:r>
-              <a:rPr lang="ko-KR" altLang="en-US" sz="1000" dirty="0"/>
-              <a:t>/          # 폰 연동 및 메시지 관련</a:t>
-            </a:r>
-          </a:p>
-          <a:p>
-            <a:r>
-              <a:rPr lang="ko-KR" altLang="en-US" sz="1000" dirty="0"/>
-              <a:t>│   ├── </a:t>
-            </a:r>
-            <a:r>
-              <a:rPr lang="ko-KR" altLang="en-US" sz="1000" dirty="0" err="1"/>
-              <a:t>message_templat</a:t>
-            </a:r>
-            <a:r>
-              <a:rPr lang="ko-KR" altLang="en-US" sz="1000" dirty="0"/>
-              <a:t>/     # 메시지 템플릿</a:t>
-            </a:r>
-          </a:p>
-          <a:p>
-            <a:r>
-              <a:rPr lang="ko-KR" altLang="en-US" sz="1000" dirty="0"/>
-              <a:t>│   ├── </a:t>
-            </a:r>
-            <a:r>
-              <a:rPr lang="ko-KR" altLang="en-US" sz="1000" dirty="0" err="1"/>
-              <a:t>Work_daily</a:t>
-            </a:r>
-            <a:r>
-              <a:rPr lang="ko-KR" altLang="en-US" sz="1000" dirty="0"/>
-              <a:t>/          # 일일 업무 정리</a:t>
-            </a:r>
-          </a:p>
-          <a:p>
-            <a:r>
-              <a:rPr lang="ko-KR" altLang="en-US" sz="1000" dirty="0"/>
-              <a:t>│   ├── app_config.py</a:t>
-            </a:r>
-          </a:p>
-          <a:p>
-            <a:r>
-              <a:rPr lang="ko-KR" altLang="en-US" sz="1000" dirty="0"/>
-              <a:t>│   ├── config.py</a:t>
-            </a:r>
-          </a:p>
-          <a:p>
-            <a:r>
-              <a:rPr lang="ko-KR" altLang="en-US" sz="1000" dirty="0"/>
-              <a:t>│   └── requirements.txt     # 파이썬 라이브러리 목록</a:t>
-            </a:r>
-          </a:p>
-          <a:p>
-            <a:r>
-              <a:rPr lang="ko-KR" altLang="en-US" sz="1000" dirty="0"/>
-              <a:t>│</a:t>
-            </a:r>
             <a:endParaRPr lang="en-US" altLang="ko-KR" sz="1000" dirty="0"/>
           </a:p>
-          <a:p>
-            <a:r>
-              <a:rPr lang="ko-KR" altLang="en-US" sz="1000" dirty="0"/>
-              <a:t>├── index.html           # 첫 화면 (시안 디자인 반영)</a:t>
-            </a:r>
-          </a:p>
-          <a:p>
-            <a:r>
-              <a:rPr lang="ko-KR" altLang="en-US" sz="1000" dirty="0"/>
-              <a:t>├── .</a:t>
-            </a:r>
-            <a:r>
-              <a:rPr lang="ko-KR" altLang="en-US" sz="1000" dirty="0" err="1"/>
-              <a:t>gitignore</a:t>
-            </a:r>
-            <a:r>
-              <a:rPr lang="ko-KR" altLang="en-US" sz="1000" dirty="0"/>
-              <a:t>               🔒 [보안 파일 차단 설정] (매우 중요!)</a:t>
-            </a:r>
-          </a:p>
-          <a:p>
-            <a:r>
-              <a:rPr lang="ko-KR" altLang="en-US" sz="1000" dirty="0"/>
-              <a:t>└── README.md                📖 프로젝트 설명서</a:t>
+        </p:txBody>
+      </p:sp>
+      <p:sp>
+        <p:nvSpPr>
+          <p:cNvPr id="4" name="TextBox 3">
+            <a:extLst>
+              <a:ext uri="{FF2B5EF4-FFF2-40B4-BE49-F238E27FC236}">
+                <a16:creationId xmlns:a16="http://schemas.microsoft.com/office/drawing/2014/main" id="{2152FA13-3E93-958C-CB21-88DCFCD51041}"/>
+              </a:ext>
+            </a:extLst>
+          </p:cNvPr>
+          <p:cNvSpPr txBox="1"/>
+          <p:nvPr/>
+        </p:nvSpPr>
+        <p:spPr>
+          <a:xfrm>
+            <a:off x="6189146" y="869752"/>
+            <a:ext cx="6099242" cy="2862322"/>
+          </a:xfrm>
+          <a:prstGeom prst="rect">
+            <a:avLst/>
+          </a:prstGeom>
+          <a:noFill/>
+        </p:spPr>
+        <p:txBody>
+          <a:bodyPr wrap="square">
+            <a:spAutoFit/>
+          </a:bodyPr>
+          <a:lstStyle/>
+          <a:p>
+            <a:r>
+              <a:rPr lang="ko-KR" altLang="en-US" dirty="0"/>
+              <a:t>&lt;</a:t>
+            </a:r>
+            <a:r>
+              <a:rPr lang="ko-KR" altLang="en-US" dirty="0" err="1"/>
+              <a:t>head</a:t>
+            </a:r>
+            <a:r>
+              <a:rPr lang="ko-KR" altLang="en-US" dirty="0"/>
+              <a:t>&gt;</a:t>
+            </a:r>
+          </a:p>
+          <a:p>
+            <a:r>
+              <a:rPr lang="ko-KR" altLang="en-US" dirty="0"/>
+              <a:t>    &lt;</a:t>
+            </a:r>
+            <a:r>
+              <a:rPr lang="ko-KR" altLang="en-US" dirty="0" err="1"/>
+              <a:t>meta</a:t>
+            </a:r>
+            <a:r>
+              <a:rPr lang="ko-KR" altLang="en-US" dirty="0"/>
+              <a:t> </a:t>
+            </a:r>
+            <a:r>
+              <a:rPr lang="ko-KR" altLang="en-US" dirty="0" err="1"/>
+              <a:t>charset</a:t>
+            </a:r>
+            <a:r>
+              <a:rPr lang="ko-KR" altLang="en-US" dirty="0"/>
+              <a:t>="UTF-8"&gt;</a:t>
+            </a:r>
+          </a:p>
+          <a:p>
+            <a:r>
+              <a:rPr lang="ko-KR" altLang="en-US" dirty="0"/>
+              <a:t>    &lt;</a:t>
+            </a:r>
+            <a:r>
+              <a:rPr lang="ko-KR" altLang="en-US" dirty="0" err="1"/>
+              <a:t>meta</a:t>
+            </a:r>
+            <a:r>
+              <a:rPr lang="ko-KR" altLang="en-US" dirty="0"/>
+              <a:t> </a:t>
+            </a:r>
+            <a:r>
+              <a:rPr lang="ko-KR" altLang="en-US" dirty="0" err="1"/>
+              <a:t>name</a:t>
+            </a:r>
+            <a:r>
+              <a:rPr lang="ko-KR" altLang="en-US" dirty="0"/>
+              <a:t>="</a:t>
+            </a:r>
+            <a:r>
+              <a:rPr lang="ko-KR" altLang="en-US" dirty="0" err="1"/>
+              <a:t>viewport</a:t>
+            </a:r>
+            <a:r>
+              <a:rPr lang="ko-KR" altLang="en-US" dirty="0"/>
+              <a:t>" </a:t>
+            </a:r>
+            <a:r>
+              <a:rPr lang="ko-KR" altLang="en-US" dirty="0" err="1"/>
+              <a:t>content</a:t>
+            </a:r>
+            <a:r>
+              <a:rPr lang="ko-KR" altLang="en-US" dirty="0"/>
+              <a:t>="</a:t>
+            </a:r>
+            <a:r>
+              <a:rPr lang="ko-KR" altLang="en-US" dirty="0" err="1"/>
+              <a:t>width</a:t>
+            </a:r>
+            <a:r>
+              <a:rPr lang="ko-KR" altLang="en-US" dirty="0"/>
+              <a:t>=</a:t>
+            </a:r>
+            <a:r>
+              <a:rPr lang="ko-KR" altLang="en-US" dirty="0" err="1"/>
+              <a:t>device-width</a:t>
+            </a:r>
+            <a:r>
+              <a:rPr lang="ko-KR" altLang="en-US" dirty="0"/>
+              <a:t>, </a:t>
+            </a:r>
+            <a:r>
+              <a:rPr lang="ko-KR" altLang="en-US" dirty="0" err="1"/>
+              <a:t>initial-scale</a:t>
+            </a:r>
+            <a:r>
+              <a:rPr lang="ko-KR" altLang="en-US" dirty="0"/>
+              <a:t>=1.0"&gt;</a:t>
+            </a:r>
+          </a:p>
+          <a:p>
+            <a:r>
+              <a:rPr lang="ko-KR" altLang="en-US" dirty="0"/>
+              <a:t>    &lt;</a:t>
+            </a:r>
+            <a:r>
+              <a:rPr lang="ko-KR" altLang="en-US" dirty="0" err="1"/>
+              <a:t>title</a:t>
+            </a:r>
+            <a:r>
+              <a:rPr lang="ko-KR" altLang="en-US" dirty="0"/>
+              <a:t>&gt;페이지 제목&lt;/</a:t>
+            </a:r>
+            <a:r>
+              <a:rPr lang="ko-KR" altLang="en-US" dirty="0" err="1"/>
+              <a:t>title</a:t>
+            </a:r>
+            <a:r>
+              <a:rPr lang="ko-KR" altLang="en-US" dirty="0"/>
+              <a:t>&gt;</a:t>
+            </a:r>
+          </a:p>
+          <a:p>
+            <a:r>
+              <a:rPr lang="ko-KR" altLang="en-US" dirty="0"/>
+              <a:t>    </a:t>
+            </a:r>
+          </a:p>
+          <a:p>
+            <a:r>
+              <a:rPr lang="ko-KR" altLang="en-US" dirty="0"/>
+              <a:t>    &lt;!-- 이 한 줄이 바로 스타일(CSS) 파일을 불러오는 연결고리입니다! --&gt;</a:t>
+            </a:r>
+          </a:p>
+          <a:p>
+            <a:r>
+              <a:rPr lang="ko-KR" altLang="en-US" dirty="0"/>
+              <a:t>    &lt;</a:t>
+            </a:r>
+            <a:r>
+              <a:rPr lang="ko-KR" altLang="en-US" dirty="0" err="1"/>
+              <a:t>link</a:t>
+            </a:r>
+            <a:r>
+              <a:rPr lang="ko-KR" altLang="en-US" dirty="0"/>
+              <a:t> </a:t>
+            </a:r>
+            <a:r>
+              <a:rPr lang="ko-KR" altLang="en-US" dirty="0" err="1"/>
+              <a:t>rel</a:t>
+            </a:r>
+            <a:r>
+              <a:rPr lang="ko-KR" altLang="en-US" dirty="0"/>
+              <a:t>="</a:t>
+            </a:r>
+            <a:r>
+              <a:rPr lang="ko-KR" altLang="en-US" dirty="0" err="1"/>
+              <a:t>stylesheet</a:t>
+            </a:r>
+            <a:r>
+              <a:rPr lang="ko-KR" altLang="en-US" dirty="0"/>
+              <a:t>" </a:t>
+            </a:r>
+            <a:r>
+              <a:rPr lang="ko-KR" altLang="en-US" dirty="0" err="1"/>
+              <a:t>href</a:t>
+            </a:r>
+            <a:r>
+              <a:rPr lang="ko-KR" altLang="en-US" dirty="0"/>
+              <a:t>="</a:t>
+            </a:r>
+            <a:r>
+              <a:rPr lang="ko-KR" altLang="en-US" dirty="0" err="1"/>
+              <a:t>css</a:t>
+            </a:r>
+            <a:r>
+              <a:rPr lang="ko-KR" altLang="en-US" dirty="0"/>
+              <a:t>/</a:t>
+            </a:r>
+            <a:r>
+              <a:rPr lang="ko-KR" altLang="en-US" dirty="0" err="1"/>
+              <a:t>style.css</a:t>
+            </a:r>
+            <a:r>
+              <a:rPr lang="ko-KR" altLang="en-US" dirty="0"/>
+              <a:t>"&gt;</a:t>
+            </a:r>
+          </a:p>
+          <a:p>
+            <a:r>
+              <a:rPr lang="ko-KR" altLang="en-US" dirty="0"/>
+              <a:t>&lt;/</a:t>
+            </a:r>
+            <a:r>
+              <a:rPr lang="ko-KR" altLang="en-US" dirty="0" err="1"/>
+              <a:t>head</a:t>
+            </a:r>
+            <a:r>
+              <a:rPr lang="ko-KR" altLang="en-US" dirty="0"/>
+              <a:t>&gt;</a:t>
             </a:r>
           </a:p>
         </p:txBody>

--- a/tamtamhomepage.pptx
+++ b/tamtamhomepage.pptx
@@ -3395,7 +3395,7 @@
         <p:spPr>
           <a:xfrm>
             <a:off x="217715" y="869752"/>
-            <a:ext cx="6096000" cy="6093976"/>
+            <a:ext cx="6096000" cy="9171742"/>
           </a:xfrm>
           <a:prstGeom prst="rect">
             <a:avLst/>
@@ -3595,7 +3595,7 @@
                   </a:schemeClr>
                 </a:solidFill>
               </a:rPr>
-              <a:t>│   │   ├── teacher_login.html   # 선생님 로그인 및 관리자 대시보드</a:t>
+              <a:t>│   │   ├── teacher_login.html   # 선생님 로그인 </a:t>
             </a:r>
             <a:endParaRPr lang="en-US" altLang="ko-KR" sz="1000" dirty="0">
               <a:solidFill>
@@ -3703,12 +3703,10 @@
                   </a:schemeClr>
                 </a:solidFill>
               </a:rPr>
-              <a:t> 모음 열기</a:t>
-            </a:r>
-          </a:p>
-          <a:p>
-            <a:r>
-              <a:rPr lang="ko-KR" altLang="en-US" sz="1000" dirty="0">
+              <a:t> 관리자 </a:t>
+            </a:r>
+            <a:r>
+              <a:rPr lang="ko-KR" altLang="en-US" sz="1000" dirty="0" err="1">
                 <a:solidFill>
                   <a:schemeClr val="tx2">
                     <a:lumMod val="50000"/>
@@ -3716,10 +3714,20 @@
                   </a:schemeClr>
                 </a:solidFill>
               </a:rPr>
-              <a:t>│   ├── </a:t>
-            </a:r>
-            <a:r>
-              <a:rPr lang="ko-KR" altLang="en-US" sz="1000" dirty="0" err="1">
+              <a:t>데시보드</a:t>
+            </a:r>
+            <a:endParaRPr lang="ko-KR" altLang="en-US" sz="1000" dirty="0">
+              <a:solidFill>
+                <a:schemeClr val="tx2">
+                  <a:lumMod val="50000"/>
+                  <a:lumOff val="50000"/>
+                </a:schemeClr>
+              </a:solidFill>
+            </a:endParaRPr>
+          </a:p>
+          <a:p>
+            <a:r>
+              <a:rPr lang="ko-KR" altLang="en-US" sz="1000" dirty="0">
                 <a:solidFill>
                   <a:schemeClr val="tx2">
                     <a:lumMod val="50000"/>
@@ -3727,10 +3735,10 @@
                   </a:schemeClr>
                 </a:solidFill>
               </a:rPr>
-              <a:t>css</a:t>
-            </a:r>
-            <a:r>
-              <a:rPr lang="ko-KR" altLang="en-US" sz="1000" dirty="0">
+              <a:t>│   ├── </a:t>
+            </a:r>
+            <a:r>
+              <a:rPr lang="ko-KR" altLang="en-US" sz="1000" dirty="0" err="1">
                 <a:solidFill>
                   <a:schemeClr val="tx2">
                     <a:lumMod val="50000"/>
@@ -3738,10 +3746,8 @@
                   </a:schemeClr>
                 </a:solidFill>
               </a:rPr>
-              <a:t>/</a:t>
-            </a:r>
-          </a:p>
-          <a:p>
+              <a:t>css</a:t>
+            </a:r>
             <a:r>
               <a:rPr lang="ko-KR" altLang="en-US" sz="1000" dirty="0">
                 <a:solidFill>
@@ -3751,7 +3757,7 @@
                   </a:schemeClr>
                 </a:solidFill>
               </a:rPr>
-              <a:t>│   │   └── style.css        # 공통 디자인 스타일시트</a:t>
+              <a:t>/</a:t>
             </a:r>
           </a:p>
           <a:p>
@@ -3764,90 +3770,7 @@
                   </a:schemeClr>
                 </a:solidFill>
               </a:rPr>
-              <a:t>│   └── </a:t>
-            </a:r>
-            <a:r>
-              <a:rPr lang="ko-KR" altLang="en-US" sz="1000" dirty="0" err="1">
-                <a:solidFill>
-                  <a:schemeClr val="tx2">
-                    <a:lumMod val="50000"/>
-                    <a:lumOff val="50000"/>
-                  </a:schemeClr>
-                </a:solidFill>
-              </a:rPr>
-              <a:t>js</a:t>
-            </a:r>
-            <a:r>
-              <a:rPr lang="ko-KR" altLang="en-US" sz="1000" dirty="0">
-                <a:solidFill>
-                  <a:schemeClr val="tx2">
-                    <a:lumMod val="50000"/>
-                    <a:lumOff val="50000"/>
-                  </a:schemeClr>
-                </a:solidFill>
-              </a:rPr>
-              <a:t>/</a:t>
-            </a:r>
-          </a:p>
-          <a:p>
-            <a:r>
-              <a:rPr lang="ko-KR" altLang="en-US" sz="1000" dirty="0">
-                <a:solidFill>
-                  <a:schemeClr val="tx2">
-                    <a:lumMod val="50000"/>
-                    <a:lumOff val="50000"/>
-                  </a:schemeClr>
-                </a:solidFill>
-              </a:rPr>
-              <a:t>│       ├── firebase.js      # </a:t>
-            </a:r>
-            <a:r>
-              <a:rPr lang="ko-KR" altLang="en-US" sz="1000" dirty="0" err="1">
-                <a:solidFill>
-                  <a:schemeClr val="tx2">
-                    <a:lumMod val="50000"/>
-                    <a:lumOff val="50000"/>
-                  </a:schemeClr>
-                </a:solidFill>
-              </a:rPr>
-              <a:t>파이어베이스</a:t>
-            </a:r>
-            <a:r>
-              <a:rPr lang="ko-KR" altLang="en-US" sz="1000" dirty="0">
-                <a:solidFill>
-                  <a:schemeClr val="tx2">
-                    <a:lumMod val="50000"/>
-                    <a:lumOff val="50000"/>
-                  </a:schemeClr>
-                </a:solidFill>
-              </a:rPr>
-              <a:t> 공통 설정 (웹용)</a:t>
-            </a:r>
-          </a:p>
-          <a:p>
-            <a:r>
-              <a:rPr lang="ko-KR" altLang="en-US" sz="1000" dirty="0">
-                <a:solidFill>
-                  <a:schemeClr val="tx2">
-                    <a:lumMod val="50000"/>
-                    <a:lumOff val="50000"/>
-                  </a:schemeClr>
-                </a:solidFill>
-              </a:rPr>
-              <a:t>│       └── auth.js          # 인증 관련 공통 로직</a:t>
-            </a:r>
-          </a:p>
-          <a:p>
-            <a:r>
-              <a:rPr lang="ko-KR" altLang="en-US" sz="1000" dirty="0">
-                <a:solidFill>
-                  <a:schemeClr val="tx2">
-                    <a:lumMod val="50000"/>
-                    <a:lumOff val="50000"/>
-                  </a:schemeClr>
-                </a:solidFill>
-              </a:rPr>
-              <a:t>│</a:t>
+              <a:t>│   │   └── style.css        # 공통 디자인 스타일시트</a:t>
             </a:r>
             <a:endParaRPr lang="en-US" altLang="ko-KR" sz="1000" dirty="0">
               <a:solidFill>
@@ -3859,6 +3782,39 @@
             </a:endParaRPr>
           </a:p>
           <a:p>
+            <a:r>
+              <a:rPr lang="ko-KR" altLang="en-US" sz="1000" dirty="0">
+                <a:solidFill>
+                  <a:schemeClr val="tx2">
+                    <a:lumMod val="50000"/>
+                    <a:lumOff val="50000"/>
+                  </a:schemeClr>
+                </a:solidFill>
+              </a:rPr>
+              <a:t>│   ├── </a:t>
+            </a:r>
+            <a:r>
+              <a:rPr lang="en-US" altLang="ko-KR" sz="1000" dirty="0" err="1">
+                <a:solidFill>
+                  <a:schemeClr val="tx2">
+                    <a:lumMod val="50000"/>
+                    <a:lumOff val="50000"/>
+                  </a:schemeClr>
+                </a:solidFill>
+              </a:rPr>
+              <a:t>index_home</a:t>
+            </a:r>
+            <a:r>
+              <a:rPr lang="ko-KR" altLang="en-US" sz="1000" dirty="0">
+                <a:solidFill>
+                  <a:schemeClr val="tx2">
+                    <a:lumMod val="50000"/>
+                    <a:lumOff val="50000"/>
+                  </a:schemeClr>
+                </a:solidFill>
+              </a:rPr>
+              <a:t>/ </a:t>
+            </a:r>
             <a:endParaRPr lang="en-US" altLang="ko-KR" sz="1000" dirty="0">
               <a:solidFill>
                 <a:schemeClr val="tx2">
@@ -3869,6 +3825,63 @@
             </a:endParaRPr>
           </a:p>
           <a:p>
+            <a:r>
+              <a:rPr lang="ko-KR" altLang="en-US" sz="1000" dirty="0">
+                <a:solidFill>
+                  <a:schemeClr val="tx2">
+                    <a:lumMod val="50000"/>
+                    <a:lumOff val="50000"/>
+                  </a:schemeClr>
+                </a:solidFill>
+              </a:rPr>
+              <a:t>│   │   └── </a:t>
+            </a:r>
+            <a:r>
+              <a:rPr lang="en-US" altLang="ko-KR" sz="1000" dirty="0" err="1">
+                <a:solidFill>
+                  <a:schemeClr val="tx2">
+                    <a:lumMod val="50000"/>
+                    <a:lumOff val="50000"/>
+                  </a:schemeClr>
+                </a:solidFill>
+              </a:rPr>
+              <a:t>index_home</a:t>
+            </a:r>
+            <a:r>
+              <a:rPr lang="ko-KR" altLang="en-US" sz="1000" dirty="0">
+                <a:solidFill>
+                  <a:schemeClr val="tx2">
+                    <a:lumMod val="50000"/>
+                    <a:lumOff val="50000"/>
+                  </a:schemeClr>
+                </a:solidFill>
+              </a:rPr>
+              <a:t>.</a:t>
+            </a:r>
+            <a:r>
+              <a:rPr lang="en-US" altLang="ko-KR" sz="1000" dirty="0">
+                <a:solidFill>
+                  <a:schemeClr val="tx2">
+                    <a:lumMod val="50000"/>
+                    <a:lumOff val="50000"/>
+                  </a:schemeClr>
+                </a:solidFill>
+              </a:rPr>
+              <a:t>html</a:t>
+            </a:r>
+            <a:r>
+              <a:rPr lang="ko-KR" altLang="en-US" sz="1000" dirty="0">
+                <a:solidFill>
+                  <a:schemeClr val="tx2">
+                    <a:lumMod val="50000"/>
+                    <a:lumOff val="50000"/>
+                  </a:schemeClr>
+                </a:solidFill>
+              </a:rPr>
+              <a:t>        # 한페이지 모으기 학원소개</a:t>
+            </a:r>
+          </a:p>
+          <a:p>
             <a:endParaRPr lang="en-US" altLang="ko-KR" sz="1000" dirty="0">
               <a:solidFill>
                 <a:schemeClr val="tx2">
@@ -3879,6 +3892,17 @@
             </a:endParaRPr>
           </a:p>
           <a:p>
+            <a:r>
+              <a:rPr lang="ko-KR" altLang="en-US" sz="1000" dirty="0">
+                <a:solidFill>
+                  <a:schemeClr val="tx2">
+                    <a:lumMod val="50000"/>
+                    <a:lumOff val="50000"/>
+                  </a:schemeClr>
+                </a:solidFill>
+              </a:rPr>
+              <a:t>│   │</a:t>
+            </a:r>
             <a:endParaRPr lang="en-US" altLang="ko-KR" sz="1000" dirty="0">
               <a:solidFill>
                 <a:schemeClr val="tx2">
@@ -3889,6 +3913,17 @@
             </a:endParaRPr>
           </a:p>
           <a:p>
+            <a:r>
+              <a:rPr lang="ko-KR" altLang="en-US" sz="1000" dirty="0">
+                <a:solidFill>
+                  <a:schemeClr val="tx2">
+                    <a:lumMod val="50000"/>
+                    <a:lumOff val="50000"/>
+                  </a:schemeClr>
+                </a:solidFill>
+              </a:rPr>
+              <a:t>│   │</a:t>
+            </a:r>
             <a:endParaRPr lang="en-US" altLang="ko-KR" sz="1000" dirty="0">
               <a:solidFill>
                 <a:schemeClr val="tx2">
@@ -3899,6 +3934,410 @@
             </a:endParaRPr>
           </a:p>
           <a:p>
+            <a:r>
+              <a:rPr lang="ko-KR" altLang="en-US" sz="1000" dirty="0">
+                <a:solidFill>
+                  <a:schemeClr val="tx2">
+                    <a:lumMod val="50000"/>
+                    <a:lumOff val="50000"/>
+                  </a:schemeClr>
+                </a:solidFill>
+              </a:rPr>
+              <a:t>│   │</a:t>
+            </a:r>
+            <a:endParaRPr lang="en-US" altLang="ko-KR" sz="1000" dirty="0">
+              <a:solidFill>
+                <a:schemeClr val="tx2">
+                  <a:lumMod val="50000"/>
+                  <a:lumOff val="50000"/>
+                </a:schemeClr>
+              </a:solidFill>
+            </a:endParaRPr>
+          </a:p>
+          <a:p>
+            <a:r>
+              <a:rPr lang="ko-KR" altLang="en-US" sz="1000" dirty="0">
+                <a:solidFill>
+                  <a:schemeClr val="tx2">
+                    <a:lumMod val="50000"/>
+                    <a:lumOff val="50000"/>
+                  </a:schemeClr>
+                </a:solidFill>
+              </a:rPr>
+              <a:t>│   │</a:t>
+            </a:r>
+            <a:endParaRPr lang="en-US" altLang="ko-KR" sz="1000" dirty="0">
+              <a:solidFill>
+                <a:schemeClr val="tx2">
+                  <a:lumMod val="50000"/>
+                  <a:lumOff val="50000"/>
+                </a:schemeClr>
+              </a:solidFill>
+            </a:endParaRPr>
+          </a:p>
+          <a:p>
+            <a:r>
+              <a:rPr lang="ko-KR" altLang="en-US" sz="1000" dirty="0">
+                <a:solidFill>
+                  <a:schemeClr val="tx2">
+                    <a:lumMod val="50000"/>
+                    <a:lumOff val="50000"/>
+                  </a:schemeClr>
+                </a:solidFill>
+              </a:rPr>
+              <a:t>│</a:t>
+            </a:r>
+            <a:endParaRPr lang="en-US" altLang="ko-KR" sz="1000" dirty="0">
+              <a:solidFill>
+                <a:schemeClr val="tx2">
+                  <a:lumMod val="50000"/>
+                  <a:lumOff val="50000"/>
+                </a:schemeClr>
+              </a:solidFill>
+            </a:endParaRPr>
+          </a:p>
+          <a:p>
+            <a:r>
+              <a:rPr lang="ko-KR" altLang="en-US" sz="1000" dirty="0">
+                <a:solidFill>
+                  <a:schemeClr val="tx2">
+                    <a:lumMod val="50000"/>
+                    <a:lumOff val="50000"/>
+                  </a:schemeClr>
+                </a:solidFill>
+              </a:rPr>
+              <a:t>│   └── </a:t>
+            </a:r>
+            <a:r>
+              <a:rPr lang="ko-KR" altLang="en-US" sz="1000" dirty="0" err="1">
+                <a:solidFill>
+                  <a:schemeClr val="tx2">
+                    <a:lumMod val="50000"/>
+                    <a:lumOff val="50000"/>
+                  </a:schemeClr>
+                </a:solidFill>
+              </a:rPr>
+              <a:t>js</a:t>
+            </a:r>
+            <a:r>
+              <a:rPr lang="ko-KR" altLang="en-US" sz="1000" dirty="0">
+                <a:solidFill>
+                  <a:schemeClr val="tx2">
+                    <a:lumMod val="50000"/>
+                    <a:lumOff val="50000"/>
+                  </a:schemeClr>
+                </a:solidFill>
+              </a:rPr>
+              <a:t>/</a:t>
+            </a:r>
+          </a:p>
+          <a:p>
+            <a:r>
+              <a:rPr lang="ko-KR" altLang="en-US" sz="1000" dirty="0">
+                <a:solidFill>
+                  <a:schemeClr val="tx2">
+                    <a:lumMod val="50000"/>
+                    <a:lumOff val="50000"/>
+                  </a:schemeClr>
+                </a:solidFill>
+              </a:rPr>
+              <a:t>│      </a:t>
+            </a:r>
+            <a:r>
+              <a:rPr lang="en-US" altLang="ko-KR" sz="1000" dirty="0">
+                <a:solidFill>
+                  <a:schemeClr val="tx2">
+                    <a:lumMod val="50000"/>
+                    <a:lumOff val="50000"/>
+                  </a:schemeClr>
+                </a:solidFill>
+              </a:rPr>
+              <a:t>   </a:t>
+            </a:r>
+            <a:r>
+              <a:rPr lang="ko-KR" altLang="en-US" sz="1000" dirty="0">
+                <a:solidFill>
+                  <a:schemeClr val="tx2">
+                    <a:lumMod val="50000"/>
+                    <a:lumOff val="50000"/>
+                  </a:schemeClr>
+                </a:solidFill>
+              </a:rPr>
+              <a:t>├── firebase.js      # </a:t>
+            </a:r>
+            <a:r>
+              <a:rPr lang="ko-KR" altLang="en-US" sz="1000" dirty="0" err="1">
+                <a:solidFill>
+                  <a:schemeClr val="tx2">
+                    <a:lumMod val="50000"/>
+                    <a:lumOff val="50000"/>
+                  </a:schemeClr>
+                </a:solidFill>
+              </a:rPr>
+              <a:t>파이어베이스</a:t>
+            </a:r>
+            <a:r>
+              <a:rPr lang="ko-KR" altLang="en-US" sz="1000" dirty="0">
+                <a:solidFill>
+                  <a:schemeClr val="tx2">
+                    <a:lumMod val="50000"/>
+                    <a:lumOff val="50000"/>
+                  </a:schemeClr>
+                </a:solidFill>
+              </a:rPr>
+              <a:t> 공통 설정 (웹용)</a:t>
+            </a:r>
+          </a:p>
+          <a:p>
+            <a:r>
+              <a:rPr lang="ko-KR" altLang="en-US" sz="1000" dirty="0">
+                <a:solidFill>
+                  <a:schemeClr val="tx2">
+                    <a:lumMod val="50000"/>
+                    <a:lumOff val="50000"/>
+                  </a:schemeClr>
+                </a:solidFill>
+              </a:rPr>
+              <a:t>│         └── auth.js          # 인증 관련 공통 로직</a:t>
+            </a:r>
+          </a:p>
+          <a:p>
+            <a:endParaRPr lang="en-US" altLang="ko-KR" sz="1000" dirty="0">
+              <a:solidFill>
+                <a:schemeClr val="tx2">
+                  <a:lumMod val="50000"/>
+                  <a:lumOff val="50000"/>
+                </a:schemeClr>
+              </a:solidFill>
+            </a:endParaRPr>
+          </a:p>
+          <a:p>
+            <a:endParaRPr lang="en-US" altLang="ko-KR" sz="1000" dirty="0">
+              <a:solidFill>
+                <a:schemeClr val="tx2">
+                  <a:lumMod val="50000"/>
+                  <a:lumOff val="50000"/>
+                </a:schemeClr>
+              </a:solidFill>
+            </a:endParaRPr>
+          </a:p>
+          <a:p>
+            <a:endParaRPr lang="en-US" altLang="ko-KR" sz="1000" dirty="0">
+              <a:solidFill>
+                <a:schemeClr val="tx2">
+                  <a:lumMod val="50000"/>
+                  <a:lumOff val="50000"/>
+                </a:schemeClr>
+              </a:solidFill>
+            </a:endParaRPr>
+          </a:p>
+          <a:p>
+            <a:endParaRPr lang="en-US" altLang="ko-KR" sz="1000" dirty="0">
+              <a:solidFill>
+                <a:schemeClr val="tx2">
+                  <a:lumMod val="50000"/>
+                  <a:lumOff val="50000"/>
+                </a:schemeClr>
+              </a:solidFill>
+            </a:endParaRPr>
+          </a:p>
+          <a:p>
+            <a:endParaRPr lang="ko-KR" altLang="en-US" sz="1000" dirty="0">
+              <a:solidFill>
+                <a:schemeClr val="tx2">
+                  <a:lumMod val="50000"/>
+                  <a:lumOff val="50000"/>
+                </a:schemeClr>
+              </a:solidFill>
+            </a:endParaRPr>
+          </a:p>
+          <a:p>
+            <a:r>
+              <a:rPr lang="ko-KR" altLang="en-US" sz="1000" dirty="0">
+                <a:solidFill>
+                  <a:schemeClr val="tx2">
+                    <a:lumMod val="50000"/>
+                    <a:lumOff val="50000"/>
+                  </a:schemeClr>
+                </a:solidFill>
+              </a:rPr>
+              <a:t>│</a:t>
+            </a:r>
+            <a:endParaRPr lang="en-US" altLang="ko-KR" sz="1000" dirty="0">
+              <a:solidFill>
+                <a:schemeClr val="tx2">
+                  <a:lumMod val="50000"/>
+                  <a:lumOff val="50000"/>
+                </a:schemeClr>
+              </a:solidFill>
+            </a:endParaRPr>
+          </a:p>
+          <a:p>
+            <a:endParaRPr lang="en-US" altLang="ko-KR" sz="1000" dirty="0">
+              <a:solidFill>
+                <a:schemeClr val="tx2">
+                  <a:lumMod val="50000"/>
+                  <a:lumOff val="50000"/>
+                </a:schemeClr>
+              </a:solidFill>
+            </a:endParaRPr>
+          </a:p>
+          <a:p>
+            <a:endParaRPr lang="en-US" altLang="ko-KR" sz="1000" dirty="0">
+              <a:solidFill>
+                <a:schemeClr val="tx2">
+                  <a:lumMod val="50000"/>
+                  <a:lumOff val="50000"/>
+                </a:schemeClr>
+              </a:solidFill>
+            </a:endParaRPr>
+          </a:p>
+          <a:p>
+            <a:endParaRPr lang="en-US" altLang="ko-KR" sz="1000" dirty="0">
+              <a:solidFill>
+                <a:schemeClr val="tx2">
+                  <a:lumMod val="50000"/>
+                  <a:lumOff val="50000"/>
+                </a:schemeClr>
+              </a:solidFill>
+            </a:endParaRPr>
+          </a:p>
+          <a:p>
+            <a:endParaRPr lang="en-US" altLang="ko-KR" sz="1000" dirty="0">
+              <a:solidFill>
+                <a:schemeClr val="tx2">
+                  <a:lumMod val="50000"/>
+                  <a:lumOff val="50000"/>
+                </a:schemeClr>
+              </a:solidFill>
+            </a:endParaRPr>
+          </a:p>
+          <a:p>
+            <a:endParaRPr lang="en-US" altLang="ko-KR" sz="1000" dirty="0">
+              <a:solidFill>
+                <a:schemeClr val="tx2">
+                  <a:lumMod val="50000"/>
+                  <a:lumOff val="50000"/>
+                </a:schemeClr>
+              </a:solidFill>
+            </a:endParaRPr>
+          </a:p>
+          <a:p>
+            <a:endParaRPr lang="en-US" altLang="ko-KR" sz="1000" dirty="0">
+              <a:solidFill>
+                <a:schemeClr val="tx2">
+                  <a:lumMod val="50000"/>
+                  <a:lumOff val="50000"/>
+                </a:schemeClr>
+              </a:solidFill>
+            </a:endParaRPr>
+          </a:p>
+          <a:p>
+            <a:endParaRPr lang="en-US" altLang="ko-KR" sz="1000" dirty="0">
+              <a:solidFill>
+                <a:schemeClr val="tx2">
+                  <a:lumMod val="50000"/>
+                  <a:lumOff val="50000"/>
+                </a:schemeClr>
+              </a:solidFill>
+            </a:endParaRPr>
+          </a:p>
+          <a:p>
+            <a:r>
+              <a:rPr lang="ko-KR" altLang="en-US" sz="1000" dirty="0">
+                <a:solidFill>
+                  <a:schemeClr val="tx2">
+                    <a:lumMod val="50000"/>
+                    <a:lumOff val="50000"/>
+                  </a:schemeClr>
+                </a:solidFill>
+              </a:rPr>
+              <a:t>│   │</a:t>
+            </a:r>
+            <a:endParaRPr lang="en-US" altLang="ko-KR" sz="1000" dirty="0">
+              <a:solidFill>
+                <a:schemeClr val="tx2">
+                  <a:lumMod val="50000"/>
+                  <a:lumOff val="50000"/>
+                </a:schemeClr>
+              </a:solidFill>
+            </a:endParaRPr>
+          </a:p>
+          <a:p>
+            <a:r>
+              <a:rPr lang="ko-KR" altLang="en-US" sz="1000" dirty="0">
+                <a:solidFill>
+                  <a:schemeClr val="tx2">
+                    <a:lumMod val="50000"/>
+                    <a:lumOff val="50000"/>
+                  </a:schemeClr>
+                </a:solidFill>
+              </a:rPr>
+              <a:t>│   │</a:t>
+            </a:r>
+            <a:endParaRPr lang="en-US" altLang="ko-KR" sz="1000" dirty="0">
+              <a:solidFill>
+                <a:schemeClr val="tx2">
+                  <a:lumMod val="50000"/>
+                  <a:lumOff val="50000"/>
+                </a:schemeClr>
+              </a:solidFill>
+            </a:endParaRPr>
+          </a:p>
+          <a:p>
+            <a:r>
+              <a:rPr lang="ko-KR" altLang="en-US" sz="1000" dirty="0">
+                <a:solidFill>
+                  <a:schemeClr val="tx2">
+                    <a:lumMod val="50000"/>
+                    <a:lumOff val="50000"/>
+                  </a:schemeClr>
+                </a:solidFill>
+              </a:rPr>
+              <a:t>│   │</a:t>
+            </a:r>
+            <a:endParaRPr lang="en-US" altLang="ko-KR" sz="1000" dirty="0">
+              <a:solidFill>
+                <a:schemeClr val="tx2">
+                  <a:lumMod val="50000"/>
+                  <a:lumOff val="50000"/>
+                </a:schemeClr>
+              </a:solidFill>
+            </a:endParaRPr>
+          </a:p>
+          <a:p>
+            <a:r>
+              <a:rPr lang="ko-KR" altLang="en-US" sz="1000" dirty="0">
+                <a:solidFill>
+                  <a:schemeClr val="tx2">
+                    <a:lumMod val="50000"/>
+                    <a:lumOff val="50000"/>
+                  </a:schemeClr>
+                </a:solidFill>
+              </a:rPr>
+              <a:t>│   │</a:t>
+            </a:r>
+            <a:endParaRPr lang="en-US" altLang="ko-KR" sz="1000" dirty="0">
+              <a:solidFill>
+                <a:schemeClr val="tx2">
+                  <a:lumMod val="50000"/>
+                  <a:lumOff val="50000"/>
+                </a:schemeClr>
+              </a:solidFill>
+            </a:endParaRPr>
+          </a:p>
+          <a:p>
+            <a:r>
+              <a:rPr lang="ko-KR" altLang="en-US" sz="1000" dirty="0">
+                <a:solidFill>
+                  <a:schemeClr val="tx2">
+                    <a:lumMod val="50000"/>
+                    <a:lumOff val="50000"/>
+                  </a:schemeClr>
+                </a:solidFill>
+              </a:rPr>
+              <a:t>│</a:t>
+            </a:r>
             <a:endParaRPr lang="en-US" altLang="ko-KR" sz="1000" dirty="0">
               <a:solidFill>
                 <a:schemeClr val="tx2">
@@ -4817,8 +5256,8 @@
         </p:nvSpPr>
         <p:spPr>
           <a:xfrm>
-            <a:off x="1102752" y="1816647"/>
-            <a:ext cx="569387" cy="293414"/>
+            <a:off x="1672139" y="3016183"/>
+            <a:ext cx="2890535" cy="293414"/>
           </a:xfrm>
           <a:prstGeom prst="rect">
             <a:avLst/>
@@ -4837,10 +5276,710 @@
               </a:lnSpc>
             </a:pPr>
             <a:r>
+              <a:rPr lang="ko-KR" altLang="en-US" sz="1000"/>
+              <a:t>절대 경로 작성을 위한 모든 페이지 </a:t>
+            </a:r>
+            <a:r>
+              <a:rPr lang="ko-KR" altLang="en-US" sz="1000" dirty="0" err="1"/>
+              <a:t>적용해야함</a:t>
+            </a:r>
+            <a:endParaRPr lang="en-US" altLang="ko-KR" sz="1000" dirty="0"/>
+          </a:p>
+        </p:txBody>
+      </p:sp>
+      <p:sp>
+        <p:nvSpPr>
+          <p:cNvPr id="4" name="TextBox 3">
+            <a:extLst>
+              <a:ext uri="{FF2B5EF4-FFF2-40B4-BE49-F238E27FC236}">
+                <a16:creationId xmlns:a16="http://schemas.microsoft.com/office/drawing/2014/main" id="{10540F7C-C2E9-9DE9-B713-79E41EA5E2C9}"/>
+              </a:ext>
+            </a:extLst>
+          </p:cNvPr>
+          <p:cNvSpPr txBox="1"/>
+          <p:nvPr/>
+        </p:nvSpPr>
+        <p:spPr>
+          <a:xfrm>
+            <a:off x="159204" y="3162890"/>
+            <a:ext cx="6098720" cy="3170099"/>
+          </a:xfrm>
+          <a:prstGeom prst="rect">
+            <a:avLst/>
+          </a:prstGeom>
+          <a:noFill/>
+        </p:spPr>
+        <p:txBody>
+          <a:bodyPr wrap="square">
+            <a:spAutoFit/>
+          </a:bodyPr>
+          <a:lstStyle/>
+          <a:p>
+            <a:r>
               <a:rPr lang="ko-KR" altLang="en-US" sz="1000" dirty="0"/>
-              <a:t>블로그</a:t>
-            </a:r>
-            <a:endParaRPr lang="en-US" altLang="ko-KR" sz="1000" dirty="0"/>
+              <a:t>&lt;</a:t>
+            </a:r>
+            <a:r>
+              <a:rPr lang="ko-KR" altLang="en-US" sz="1000" dirty="0" err="1"/>
+              <a:t>head</a:t>
+            </a:r>
+            <a:r>
+              <a:rPr lang="ko-KR" altLang="en-US" sz="1000" dirty="0"/>
+              <a:t>&gt;</a:t>
+            </a:r>
+          </a:p>
+          <a:p>
+            <a:r>
+              <a:rPr lang="ko-KR" altLang="en-US" sz="1000" dirty="0"/>
+              <a:t>    &lt;</a:t>
+            </a:r>
+            <a:r>
+              <a:rPr lang="ko-KR" altLang="en-US" sz="1000" dirty="0" err="1"/>
+              <a:t>meta</a:t>
+            </a:r>
+            <a:r>
+              <a:rPr lang="ko-KR" altLang="en-US" sz="1000" dirty="0"/>
+              <a:t> </a:t>
+            </a:r>
+            <a:r>
+              <a:rPr lang="ko-KR" altLang="en-US" sz="1000" dirty="0" err="1"/>
+              <a:t>charset</a:t>
+            </a:r>
+            <a:r>
+              <a:rPr lang="ko-KR" altLang="en-US" sz="1000" dirty="0"/>
+              <a:t>="UTF-8"&gt;</a:t>
+            </a:r>
+          </a:p>
+          <a:p>
+            <a:r>
+              <a:rPr lang="ko-KR" altLang="en-US" sz="1000" dirty="0"/>
+              <a:t>    &lt;</a:t>
+            </a:r>
+            <a:r>
+              <a:rPr lang="ko-KR" altLang="en-US" sz="1000" dirty="0" err="1"/>
+              <a:t>title</a:t>
+            </a:r>
+            <a:r>
+              <a:rPr lang="ko-KR" altLang="en-US" sz="1000" dirty="0"/>
+              <a:t>&gt;페이지 제목&lt;/</a:t>
+            </a:r>
+            <a:r>
+              <a:rPr lang="ko-KR" altLang="en-US" sz="1000" dirty="0" err="1"/>
+              <a:t>title</a:t>
+            </a:r>
+            <a:r>
+              <a:rPr lang="ko-KR" altLang="en-US" sz="1000" dirty="0"/>
+              <a:t>&gt;</a:t>
+            </a:r>
+          </a:p>
+          <a:p>
+            <a:endParaRPr lang="ko-KR" altLang="en-US" sz="1000" dirty="0"/>
+          </a:p>
+          <a:p>
+            <a:r>
+              <a:rPr lang="ko-KR" altLang="en-US" sz="1000" dirty="0"/>
+              <a:t>    &lt;!-- 👇 이 스크립트 하나면 경로 고민 끝! --&gt;</a:t>
+            </a:r>
+          </a:p>
+          <a:p>
+            <a:r>
+              <a:rPr lang="ko-KR" altLang="en-US" sz="1000" dirty="0"/>
+              <a:t>    </a:t>
+            </a:r>
+            <a:r>
+              <a:rPr lang="ko-KR" altLang="en-US" sz="1000" dirty="0">
+                <a:highlight>
+                  <a:srgbClr val="FFFF00"/>
+                </a:highlight>
+              </a:rPr>
+              <a:t>&lt;</a:t>
+            </a:r>
+            <a:r>
+              <a:rPr lang="ko-KR" altLang="en-US" sz="1000" dirty="0" err="1">
+                <a:highlight>
+                  <a:srgbClr val="FFFF00"/>
+                </a:highlight>
+              </a:rPr>
+              <a:t>script</a:t>
+            </a:r>
+            <a:r>
+              <a:rPr lang="ko-KR" altLang="en-US" sz="1000" dirty="0">
+                <a:highlight>
+                  <a:srgbClr val="FFFF00"/>
+                </a:highlight>
+              </a:rPr>
+              <a:t>&gt;</a:t>
+            </a:r>
+          </a:p>
+          <a:p>
+            <a:r>
+              <a:rPr lang="ko-KR" altLang="en-US" sz="1000" dirty="0">
+                <a:highlight>
+                  <a:srgbClr val="FFFF00"/>
+                </a:highlight>
+              </a:rPr>
+              <a:t>        (</a:t>
+            </a:r>
+            <a:r>
+              <a:rPr lang="ko-KR" altLang="en-US" sz="1000" dirty="0" err="1">
+                <a:highlight>
+                  <a:srgbClr val="FFFF00"/>
+                </a:highlight>
+              </a:rPr>
+              <a:t>function</a:t>
+            </a:r>
+            <a:r>
+              <a:rPr lang="ko-KR" altLang="en-US" sz="1000" dirty="0">
+                <a:highlight>
+                  <a:srgbClr val="FFFF00"/>
+                </a:highlight>
+              </a:rPr>
+              <a:t>() {</a:t>
+            </a:r>
+          </a:p>
+          <a:p>
+            <a:r>
+              <a:rPr lang="ko-KR" altLang="en-US" sz="1000" dirty="0">
+                <a:highlight>
+                  <a:srgbClr val="FFFF00"/>
+                </a:highlight>
+              </a:rPr>
+              <a:t>            </a:t>
+            </a:r>
+            <a:r>
+              <a:rPr lang="ko-KR" altLang="en-US" sz="1000" dirty="0" err="1">
+                <a:highlight>
+                  <a:srgbClr val="FFFF00"/>
+                </a:highlight>
+              </a:rPr>
+              <a:t>const</a:t>
+            </a:r>
+            <a:r>
+              <a:rPr lang="ko-KR" altLang="en-US" sz="1000" dirty="0">
+                <a:highlight>
+                  <a:srgbClr val="FFFF00"/>
+                </a:highlight>
+              </a:rPr>
+              <a:t> </a:t>
+            </a:r>
+            <a:r>
+              <a:rPr lang="ko-KR" altLang="en-US" sz="1000" dirty="0" err="1">
+                <a:highlight>
+                  <a:srgbClr val="FFFF00"/>
+                </a:highlight>
+              </a:rPr>
+              <a:t>isGitHub</a:t>
+            </a:r>
+            <a:r>
+              <a:rPr lang="ko-KR" altLang="en-US" sz="1000" dirty="0">
+                <a:highlight>
+                  <a:srgbClr val="FFFF00"/>
+                </a:highlight>
+              </a:rPr>
+              <a:t> = </a:t>
+            </a:r>
+            <a:r>
+              <a:rPr lang="ko-KR" altLang="en-US" sz="1000" dirty="0" err="1">
+                <a:highlight>
+                  <a:srgbClr val="FFFF00"/>
+                </a:highlight>
+              </a:rPr>
+              <a:t>window.location.hostname.includes</a:t>
+            </a:r>
+            <a:r>
+              <a:rPr lang="ko-KR" altLang="en-US" sz="1000" dirty="0">
+                <a:highlight>
+                  <a:srgbClr val="FFFF00"/>
+                </a:highlight>
+              </a:rPr>
+              <a:t>("</a:t>
+            </a:r>
+            <a:r>
+              <a:rPr lang="ko-KR" altLang="en-US" sz="1000" dirty="0" err="1">
+                <a:highlight>
+                  <a:srgbClr val="FFFF00"/>
+                </a:highlight>
+              </a:rPr>
+              <a:t>github.io</a:t>
+            </a:r>
+            <a:r>
+              <a:rPr lang="ko-KR" altLang="en-US" sz="1000" dirty="0">
+                <a:highlight>
+                  <a:srgbClr val="FFFF00"/>
+                </a:highlight>
+              </a:rPr>
+              <a:t>");</a:t>
+            </a:r>
+          </a:p>
+          <a:p>
+            <a:r>
+              <a:rPr lang="ko-KR" altLang="en-US" sz="1000" dirty="0">
+                <a:highlight>
+                  <a:srgbClr val="FFFF00"/>
+                </a:highlight>
+              </a:rPr>
+              <a:t>            </a:t>
+            </a:r>
+            <a:r>
+              <a:rPr lang="ko-KR" altLang="en-US" sz="1000" dirty="0" err="1">
+                <a:highlight>
+                  <a:srgbClr val="FFFF00"/>
+                </a:highlight>
+              </a:rPr>
+              <a:t>const</a:t>
+            </a:r>
+            <a:r>
+              <a:rPr lang="ko-KR" altLang="en-US" sz="1000" dirty="0">
+                <a:highlight>
+                  <a:srgbClr val="FFFF00"/>
+                </a:highlight>
+              </a:rPr>
+              <a:t> </a:t>
+            </a:r>
+            <a:r>
+              <a:rPr lang="ko-KR" altLang="en-US" sz="1000" dirty="0" err="1">
+                <a:highlight>
+                  <a:srgbClr val="FFFF00"/>
+                </a:highlight>
+              </a:rPr>
+              <a:t>repoName</a:t>
+            </a:r>
+            <a:r>
+              <a:rPr lang="ko-KR" altLang="en-US" sz="1000" dirty="0">
+                <a:highlight>
+                  <a:srgbClr val="FFFF00"/>
+                </a:highlight>
+              </a:rPr>
+              <a:t> = "/</a:t>
+            </a:r>
+            <a:r>
+              <a:rPr lang="ko-KR" altLang="en-US" sz="1000" dirty="0" err="1">
+                <a:highlight>
+                  <a:srgbClr val="FFFF00"/>
+                </a:highlight>
+              </a:rPr>
+              <a:t>tamtamstudy_homepage</a:t>
+            </a:r>
+            <a:r>
+              <a:rPr lang="ko-KR" altLang="en-US" sz="1000" dirty="0">
+                <a:highlight>
+                  <a:srgbClr val="FFFF00"/>
+                </a:highlight>
+              </a:rPr>
+              <a:t>"; // 본인 </a:t>
+            </a:r>
+            <a:r>
+              <a:rPr lang="ko-KR" altLang="en-US" sz="1000" dirty="0" err="1">
+                <a:highlight>
+                  <a:srgbClr val="FFFF00"/>
+                </a:highlight>
+              </a:rPr>
+              <a:t>레포지토리</a:t>
+            </a:r>
+            <a:r>
+              <a:rPr lang="ko-KR" altLang="en-US" sz="1000" dirty="0">
+                <a:highlight>
+                  <a:srgbClr val="FFFF00"/>
+                </a:highlight>
+              </a:rPr>
+              <a:t> 이름</a:t>
+            </a:r>
+          </a:p>
+          <a:p>
+            <a:r>
+              <a:rPr lang="ko-KR" altLang="en-US" sz="1000" dirty="0">
+                <a:highlight>
+                  <a:srgbClr val="FFFF00"/>
+                </a:highlight>
+              </a:rPr>
+              <a:t>            </a:t>
+            </a:r>
+            <a:r>
+              <a:rPr lang="ko-KR" altLang="en-US" sz="1000" dirty="0" err="1">
+                <a:highlight>
+                  <a:srgbClr val="FFFF00"/>
+                </a:highlight>
+              </a:rPr>
+              <a:t>if</a:t>
+            </a:r>
+            <a:r>
+              <a:rPr lang="ko-KR" altLang="en-US" sz="1000" dirty="0">
+                <a:highlight>
+                  <a:srgbClr val="FFFF00"/>
+                </a:highlight>
+              </a:rPr>
+              <a:t> (</a:t>
+            </a:r>
+            <a:r>
+              <a:rPr lang="ko-KR" altLang="en-US" sz="1000" dirty="0" err="1">
+                <a:highlight>
+                  <a:srgbClr val="FFFF00"/>
+                </a:highlight>
+              </a:rPr>
+              <a:t>isGitHub</a:t>
+            </a:r>
+            <a:r>
+              <a:rPr lang="ko-KR" altLang="en-US" sz="1000" dirty="0">
+                <a:highlight>
+                  <a:srgbClr val="FFFF00"/>
+                </a:highlight>
+              </a:rPr>
+              <a:t>) {</a:t>
+            </a:r>
+          </a:p>
+          <a:p>
+            <a:r>
+              <a:rPr lang="ko-KR" altLang="en-US" sz="1000" dirty="0">
+                <a:highlight>
+                  <a:srgbClr val="FFFF00"/>
+                </a:highlight>
+              </a:rPr>
+              <a:t>                </a:t>
+            </a:r>
+            <a:r>
+              <a:rPr lang="ko-KR" altLang="en-US" sz="1000" dirty="0" err="1">
+                <a:highlight>
+                  <a:srgbClr val="FFFF00"/>
+                </a:highlight>
+              </a:rPr>
+              <a:t>document.write</a:t>
+            </a:r>
+            <a:r>
+              <a:rPr lang="ko-KR" altLang="en-US" sz="1000" dirty="0">
+                <a:highlight>
+                  <a:srgbClr val="FFFF00"/>
+                </a:highlight>
+              </a:rPr>
+              <a:t>('&lt;</a:t>
+            </a:r>
+            <a:r>
+              <a:rPr lang="ko-KR" altLang="en-US" sz="1000" dirty="0" err="1">
+                <a:highlight>
+                  <a:srgbClr val="FFFF00"/>
+                </a:highlight>
+              </a:rPr>
+              <a:t>base</a:t>
+            </a:r>
+            <a:r>
+              <a:rPr lang="ko-KR" altLang="en-US" sz="1000" dirty="0">
+                <a:highlight>
+                  <a:srgbClr val="FFFF00"/>
+                </a:highlight>
+              </a:rPr>
+              <a:t> </a:t>
+            </a:r>
+            <a:r>
+              <a:rPr lang="ko-KR" altLang="en-US" sz="1000" dirty="0" err="1">
+                <a:highlight>
+                  <a:srgbClr val="FFFF00"/>
+                </a:highlight>
+              </a:rPr>
+              <a:t>href</a:t>
+            </a:r>
+            <a:r>
+              <a:rPr lang="ko-KR" altLang="en-US" sz="1000" dirty="0">
+                <a:highlight>
+                  <a:srgbClr val="FFFF00"/>
+                </a:highlight>
+              </a:rPr>
+              <a:t>="' + </a:t>
+            </a:r>
+            <a:r>
+              <a:rPr lang="ko-KR" altLang="en-US" sz="1000" dirty="0" err="1">
+                <a:highlight>
+                  <a:srgbClr val="FFFF00"/>
+                </a:highlight>
+              </a:rPr>
+              <a:t>window.location.origin</a:t>
+            </a:r>
+            <a:r>
+              <a:rPr lang="ko-KR" altLang="en-US" sz="1000" dirty="0">
+                <a:highlight>
+                  <a:srgbClr val="FFFF00"/>
+                </a:highlight>
+              </a:rPr>
+              <a:t> + </a:t>
+            </a:r>
+            <a:r>
+              <a:rPr lang="ko-KR" altLang="en-US" sz="1000" dirty="0" err="1">
+                <a:highlight>
+                  <a:srgbClr val="FFFF00"/>
+                </a:highlight>
+              </a:rPr>
+              <a:t>repoName</a:t>
+            </a:r>
+            <a:r>
+              <a:rPr lang="ko-KR" altLang="en-US" sz="1000" dirty="0">
+                <a:highlight>
+                  <a:srgbClr val="FFFF00"/>
+                </a:highlight>
+              </a:rPr>
+              <a:t> + '/"&gt;');</a:t>
+            </a:r>
+          </a:p>
+          <a:p>
+            <a:r>
+              <a:rPr lang="ko-KR" altLang="en-US" sz="1000" dirty="0">
+                <a:highlight>
+                  <a:srgbClr val="FFFF00"/>
+                </a:highlight>
+              </a:rPr>
+              <a:t>            } </a:t>
+            </a:r>
+            <a:r>
+              <a:rPr lang="ko-KR" altLang="en-US" sz="1000" dirty="0" err="1">
+                <a:highlight>
+                  <a:srgbClr val="FFFF00"/>
+                </a:highlight>
+              </a:rPr>
+              <a:t>else</a:t>
+            </a:r>
+            <a:r>
+              <a:rPr lang="ko-KR" altLang="en-US" sz="1000" dirty="0">
+                <a:highlight>
+                  <a:srgbClr val="FFFF00"/>
+                </a:highlight>
+              </a:rPr>
+              <a:t> {</a:t>
+            </a:r>
+          </a:p>
+          <a:p>
+            <a:r>
+              <a:rPr lang="ko-KR" altLang="en-US" sz="1000" dirty="0">
+                <a:highlight>
+                  <a:srgbClr val="FFFF00"/>
+                </a:highlight>
+              </a:rPr>
+              <a:t>                </a:t>
+            </a:r>
+            <a:r>
+              <a:rPr lang="ko-KR" altLang="en-US" sz="1000" dirty="0" err="1">
+                <a:highlight>
+                  <a:srgbClr val="FFFF00"/>
+                </a:highlight>
+              </a:rPr>
+              <a:t>document.write</a:t>
+            </a:r>
+            <a:r>
+              <a:rPr lang="ko-KR" altLang="en-US" sz="1000" dirty="0">
+                <a:highlight>
+                  <a:srgbClr val="FFFF00"/>
+                </a:highlight>
+              </a:rPr>
+              <a:t>('&lt;</a:t>
+            </a:r>
+            <a:r>
+              <a:rPr lang="ko-KR" altLang="en-US" sz="1000" dirty="0" err="1">
+                <a:highlight>
+                  <a:srgbClr val="FFFF00"/>
+                </a:highlight>
+              </a:rPr>
+              <a:t>base</a:t>
+            </a:r>
+            <a:r>
+              <a:rPr lang="ko-KR" altLang="en-US" sz="1000" dirty="0">
+                <a:highlight>
+                  <a:srgbClr val="FFFF00"/>
+                </a:highlight>
+              </a:rPr>
+              <a:t> </a:t>
+            </a:r>
+            <a:r>
+              <a:rPr lang="ko-KR" altLang="en-US" sz="1000" dirty="0" err="1">
+                <a:highlight>
+                  <a:srgbClr val="FFFF00"/>
+                </a:highlight>
+              </a:rPr>
+              <a:t>href</a:t>
+            </a:r>
+            <a:r>
+              <a:rPr lang="ko-KR" altLang="en-US" sz="1000" dirty="0">
+                <a:highlight>
+                  <a:srgbClr val="FFFF00"/>
+                </a:highlight>
+              </a:rPr>
+              <a:t>="/"&gt;');</a:t>
+            </a:r>
+          </a:p>
+          <a:p>
+            <a:r>
+              <a:rPr lang="ko-KR" altLang="en-US" sz="1000" dirty="0">
+                <a:highlight>
+                  <a:srgbClr val="FFFF00"/>
+                </a:highlight>
+              </a:rPr>
+              <a:t>            }</a:t>
+            </a:r>
+          </a:p>
+          <a:p>
+            <a:r>
+              <a:rPr lang="ko-KR" altLang="en-US" sz="1000" dirty="0">
+                <a:highlight>
+                  <a:srgbClr val="FFFF00"/>
+                </a:highlight>
+              </a:rPr>
+              <a:t>        })();</a:t>
+            </a:r>
+          </a:p>
+          <a:p>
+            <a:r>
+              <a:rPr lang="ko-KR" altLang="en-US" sz="1000" dirty="0">
+                <a:highlight>
+                  <a:srgbClr val="FFFF00"/>
+                </a:highlight>
+              </a:rPr>
+              <a:t>    &lt;/</a:t>
+            </a:r>
+            <a:r>
+              <a:rPr lang="ko-KR" altLang="en-US" sz="1000" dirty="0" err="1">
+                <a:highlight>
+                  <a:srgbClr val="FFFF00"/>
+                </a:highlight>
+              </a:rPr>
+              <a:t>script</a:t>
+            </a:r>
+            <a:r>
+              <a:rPr lang="ko-KR" altLang="en-US" sz="1000" dirty="0">
+                <a:highlight>
+                  <a:srgbClr val="FFFF00"/>
+                </a:highlight>
+              </a:rPr>
+              <a:t>&gt;</a:t>
+            </a:r>
+          </a:p>
+          <a:p>
+            <a:endParaRPr lang="ko-KR" altLang="en-US" sz="1000" dirty="0"/>
+          </a:p>
+          <a:p>
+            <a:r>
+              <a:rPr lang="ko-KR" altLang="en-US" sz="1000" dirty="0"/>
+              <a:t>    &lt;!-- 이후부터는 무조건 / 로 시작하는 절대 경로만 쓰시면 됩니다! --&gt;</a:t>
+            </a:r>
+          </a:p>
+          <a:p>
+            <a:r>
+              <a:rPr lang="ko-KR" altLang="en-US" sz="1000" dirty="0"/>
+              <a:t>    &lt;</a:t>
+            </a:r>
+            <a:r>
+              <a:rPr lang="ko-KR" altLang="en-US" sz="1000" dirty="0" err="1"/>
+              <a:t>link</a:t>
+            </a:r>
+            <a:r>
+              <a:rPr lang="ko-KR" altLang="en-US" sz="1000" dirty="0"/>
+              <a:t> </a:t>
+            </a:r>
+            <a:r>
+              <a:rPr lang="ko-KR" altLang="en-US" sz="1000" dirty="0" err="1"/>
+              <a:t>rel</a:t>
+            </a:r>
+            <a:r>
+              <a:rPr lang="ko-KR" altLang="en-US" sz="1000" dirty="0"/>
+              <a:t>="</a:t>
+            </a:r>
+            <a:r>
+              <a:rPr lang="ko-KR" altLang="en-US" sz="1000" dirty="0" err="1"/>
+              <a:t>stylesheet</a:t>
+            </a:r>
+            <a:r>
+              <a:rPr lang="ko-KR" altLang="en-US" sz="1000" dirty="0"/>
+              <a:t>" </a:t>
+            </a:r>
+            <a:r>
+              <a:rPr lang="ko-KR" altLang="en-US" sz="1000" dirty="0" err="1"/>
+              <a:t>href</a:t>
+            </a:r>
+            <a:r>
+              <a:rPr lang="ko-KR" altLang="en-US" sz="1000" dirty="0"/>
+              <a:t>="/</a:t>
+            </a:r>
+            <a:r>
+              <a:rPr lang="ko-KR" altLang="en-US" sz="1000" dirty="0" err="1"/>
+              <a:t>web</a:t>
+            </a:r>
+            <a:r>
+              <a:rPr lang="ko-KR" altLang="en-US" sz="1000" dirty="0"/>
+              <a:t>/</a:t>
+            </a:r>
+            <a:r>
+              <a:rPr lang="ko-KR" altLang="en-US" sz="1000" dirty="0" err="1"/>
+              <a:t>css</a:t>
+            </a:r>
+            <a:r>
+              <a:rPr lang="ko-KR" altLang="en-US" sz="1000" dirty="0"/>
+              <a:t>/</a:t>
+            </a:r>
+            <a:r>
+              <a:rPr lang="ko-KR" altLang="en-US" sz="1000" dirty="0" err="1"/>
+              <a:t>style.css</a:t>
+            </a:r>
+            <a:r>
+              <a:rPr lang="ko-KR" altLang="en-US" sz="1000" dirty="0"/>
+              <a:t>"&gt;</a:t>
+            </a:r>
+          </a:p>
+          <a:p>
+            <a:r>
+              <a:rPr lang="ko-KR" altLang="en-US" sz="1000" dirty="0"/>
+              <a:t>&lt;/</a:t>
+            </a:r>
+            <a:r>
+              <a:rPr lang="ko-KR" altLang="en-US" sz="1000" dirty="0" err="1"/>
+              <a:t>head</a:t>
+            </a:r>
+            <a:r>
+              <a:rPr lang="ko-KR" altLang="en-US" sz="1000" dirty="0"/>
+              <a:t>&gt;</a:t>
+            </a:r>
+          </a:p>
+        </p:txBody>
+      </p:sp>
+      <p:sp>
+        <p:nvSpPr>
+          <p:cNvPr id="8" name="TextBox 7">
+            <a:extLst>
+              <a:ext uri="{FF2B5EF4-FFF2-40B4-BE49-F238E27FC236}">
+                <a16:creationId xmlns:a16="http://schemas.microsoft.com/office/drawing/2014/main" id="{40E79344-331D-DFE9-E9F5-64C9C38F19B4}"/>
+              </a:ext>
+            </a:extLst>
+          </p:cNvPr>
+          <p:cNvSpPr txBox="1"/>
+          <p:nvPr/>
+        </p:nvSpPr>
+        <p:spPr>
+          <a:xfrm>
+            <a:off x="1069409" y="6484075"/>
+            <a:ext cx="4095993" cy="293414"/>
+          </a:xfrm>
+          <a:prstGeom prst="rect">
+            <a:avLst/>
+          </a:prstGeom>
+          <a:noFill/>
+        </p:spPr>
+        <p:txBody>
+          <a:bodyPr wrap="none" rtlCol="0">
+            <a:spAutoFit/>
+          </a:bodyPr>
+          <a:lstStyle/>
+          <a:p>
+            <a:pPr>
+              <a:lnSpc>
+                <a:spcPct val="150000"/>
+              </a:lnSpc>
+            </a:pPr>
+            <a:r>
+              <a:rPr lang="ko-KR" altLang="en-US" sz="1000" dirty="0">
+                <a:solidFill>
+                  <a:srgbClr val="FF0000"/>
+                </a:solidFill>
+              </a:rPr>
+              <a:t>한화면에 여러 개의 패이지가 들어가는 곳에서는 이 태그 사용 금지 </a:t>
+            </a:r>
+            <a:endParaRPr lang="en-US" altLang="ko-KR" sz="1000" dirty="0">
+              <a:solidFill>
+                <a:srgbClr val="FF0000"/>
+              </a:solidFill>
+            </a:endParaRPr>
           </a:p>
         </p:txBody>
       </p:sp>
